--- a/assets/powerpoints/module-sante/A2-911-811-clinique-ou-pharmacie.pptx
+++ b/assets/powerpoints/module-sante/A2-911-811-clinique-ou-pharmacie.pptx
@@ -17,6 +17,7 @@
     <p:sldId id="265" r:id="rId17"/>
     <p:sldId id="266" r:id="rId18"/>
     <p:sldId id="267" r:id="rId19"/>
+    <p:sldId id="268" r:id="rId20"/>
   </p:sldIdLst>
   <p:sldSz cx="12191695" cy="6858000" type="screen4x3"/>
   <p:notesSz cx="6858000" cy="9144000"/>
@@ -583,7 +584,7 @@
           <a:lstStyle/>
           <a:p>
             <a:r>
-              <a:t>Point sensible : dans plusieurs pays, l'hôpital est la porte normale. Dire que ce n'est pas un jugement, c'est une organisation différente.</a:t>
+              <a:t>Corriger en groupe. Donner la bonne réponse, sans revenir sur qui s'est trompé.</a:t>
             </a:r>
           </a:p>
         </p:txBody>
@@ -653,7 +654,7 @@
           <a:lstStyle/>
           <a:p>
             <a:r>
-              <a:t>Vingt minutes, avec les téléphones. Faire chercher les vraies adresses du quartier. C'est la partie de la séance qui sert le plus vite.</a:t>
+              <a:t>Point sensible : dans plusieurs pays, l'hôpital est la porte normale. Dire que ce n'est pas un jugement, c'est une organisation différente.</a:t>
             </a:r>
           </a:p>
         </p:txBody>
@@ -723,6 +724,76 @@
           <a:lstStyle/>
           <a:p>
             <a:r>
+              <a:t>Vingt minutes, avec les téléphones. Faire chercher les vraies adresses du quartier. C'est la partie de la séance qui sert le plus vite.</a:t>
+            </a:r>
+          </a:p>
+        </p:txBody>
+      </p:sp>
+      <p:sp>
+        <p:nvSpPr>
+          <p:cNvPr id="4" name="Slide Number Placeholder 3"/>
+          <p:cNvSpPr>
+            <a:spLocks noGrp="1"/>
+          </p:cNvSpPr>
+          <p:nvPr>
+            <p:ph type="sldNum" idx="5" sz="quarter"/>
+          </p:nvPr>
+        </p:nvSpPr>
+        <p:spPr/>
+      </p:sp>
+    </p:spTree>
+  </p:cSld>
+  <p:clrMapOvr>
+    <a:masterClrMapping/>
+  </p:clrMapOvr>
+</p:notes>
+</file>
+
+<file path=ppt/notesSlides/notesSlide13.xml><?xml version="1.0" encoding="utf-8"?>
+<p:notes xmlns:a="http://schemas.openxmlformats.org/drawingml/2006/main" xmlns:p="http://schemas.openxmlformats.org/presentationml/2006/main" xmlns:r="http://schemas.openxmlformats.org/officeDocument/2006/relationships">
+  <p:cSld>
+    <p:spTree>
+      <p:nvGrpSpPr>
+        <p:cNvPr id="1" name=""/>
+        <p:cNvGrpSpPr/>
+        <p:nvPr/>
+      </p:nvGrpSpPr>
+      <p:grpSpPr>
+        <a:xfrm>
+          <a:off x="0" y="0"/>
+          <a:ext cx="0" cy="0"/>
+          <a:chOff x="0" y="0"/>
+          <a:chExt cx="0" cy="0"/>
+        </a:xfrm>
+      </p:grpSpPr>
+      <p:sp>
+        <p:nvSpPr>
+          <p:cNvPr id="2" name="Slide Image Placeholder 1"/>
+          <p:cNvSpPr>
+            <a:spLocks noGrp="1"/>
+          </p:cNvSpPr>
+          <p:nvPr>
+            <p:ph type="sldImg" idx="2"/>
+          </p:nvPr>
+        </p:nvSpPr>
+        <p:spPr/>
+      </p:sp>
+      <p:sp>
+        <p:nvSpPr>
+          <p:cNvPr id="3" name="Notes Placeholder 2"/>
+          <p:cNvSpPr>
+            <a:spLocks noGrp="1"/>
+          </p:cNvSpPr>
+          <p:nvPr>
+            <p:ph type="body" idx="3" sz="quarter"/>
+          </p:nvPr>
+        </p:nvSpPr>
+        <p:spPr/>
+        <p:txBody>
+          <a:bodyPr/>
+          <a:lstStyle/>
+          <a:p>
+            <a:r>
               <a:t>Ramasser et lire : les situations réelles du groupe alimentent la pratique 2 des prochaines cohortes.</a:t>
             </a:r>
           </a:p>
@@ -1213,7 +1284,7 @@
           <a:lstStyle/>
           <a:p>
             <a:r>
-              <a:t>La quatrième surprend toujours : on peut poser une question au pharmacien sans rien acheter et sans rendez-vous. Le dire explicitement.</a:t>
+              <a:t>Projeter avant d'ouvrir l'activité. Faire dire à deux ou trois élèves où irait la première réponse, sans y toucher : on vérifie qu'ils ont compris la consigne, pas le contenu. Ouvrir ensuite le module sur les postes.</a:t>
             </a:r>
           </a:p>
         </p:txBody>
@@ -1283,7 +1354,7 @@
           <a:lstStyle/>
           <a:p>
             <a:r>
-              <a:t>Corriger en groupe. Donner la bonne réponse, sans revenir sur qui s'est trompé.</a:t>
+              <a:t>La quatrième surprend toujours : on peut poser une question au pharmacien sans rien acheter et sans rendez-vous. Le dire explicitement.</a:t>
             </a:r>
           </a:p>
         </p:txBody>
@@ -4705,7 +4776,7 @@
                 </a:solidFill>
                 <a:latin typeface="Verdana"/>
               </a:rPr>
-              <a:t>LE PIÈGE DE L'URGENCE</a:t>
+              <a:t>CORRECTION</a:t>
             </a:r>
           </a:p>
         </p:txBody>
@@ -4744,67 +4815,21 @@
                 </a:solidFill>
                 <a:latin typeface="Verdana"/>
               </a:rPr>
-              <a:t>Le piège le plus fréquent</a:t>
-            </a:r>
-          </a:p>
-        </p:txBody>
-      </p:sp>
-      <p:sp>
-        <p:nvSpPr>
-          <p:cNvPr id="7" name="Rounded Rectangle 6"/>
-          <p:cNvSpPr/>
-          <p:nvPr/>
-        </p:nvSpPr>
-        <p:spPr>
-          <a:xfrm>
-            <a:off x="566928" y="1856232"/>
-            <a:ext cx="5428335" cy="2331720"/>
-          </a:xfrm>
-          <a:prstGeom prst="roundRect">
-            <a:avLst>
-              <a:gd name="adj" fmla="val 6274"/>
-            </a:avLst>
-          </a:prstGeom>
-          <a:solidFill>
-            <a:srgbClr val="FFF6F5"/>
-          </a:solidFill>
-          <a:ln w="12700">
-            <a:solidFill>
-              <a:srgbClr val="DC2626"/>
-            </a:solidFill>
-          </a:ln>
-          <a:effectLst/>
-        </p:spPr>
-        <p:style>
-          <a:lnRef idx="1">
-            <a:schemeClr val="accent1"/>
-          </a:lnRef>
-          <a:fillRef idx="3">
-            <a:schemeClr val="accent1"/>
-          </a:fillRef>
-          <a:effectRef idx="2">
-            <a:schemeClr val="accent1"/>
-          </a:effectRef>
-          <a:fontRef idx="minor">
-            <a:schemeClr val="lt1"/>
-          </a:fontRef>
-        </p:style>
-        <p:txBody>
-          <a:bodyPr rtlCol="0" anchor="ctr"/>
-          <a:lstStyle/>
-          <a:p/>
-        </p:txBody>
-      </p:sp>
-      <p:sp>
-        <p:nvSpPr>
-          <p:cNvPr id="8" name="TextBox 7"/>
+              <a:t>Et dans ces cas-là ?</a:t>
+            </a:r>
+          </a:p>
+        </p:txBody>
+      </p:sp>
+      <p:sp>
+        <p:nvSpPr>
+          <p:cNvPr id="7" name="TextBox 6"/>
           <p:cNvSpPr txBox="1"/>
           <p:nvPr/>
         </p:nvSpPr>
         <p:spPr>
           <a:xfrm>
-            <a:off x="932688" y="2130552"/>
-            <a:ext cx="4696815" cy="274320"/>
+            <a:off x="566928" y="1645920"/>
+            <a:ext cx="11057839" cy="329184"/>
           </a:xfrm>
           <a:prstGeom prst="rect">
             <a:avLst/>
@@ -4823,198 +4848,35 @@
               </a:lnSpc>
             </a:pPr>
             <a:r>
-              <a:rPr sz="1300" b="1" i="0" spc="156">
-                <a:solidFill>
-                  <a:srgbClr val="B91C1C"/>
-                </a:solidFill>
-                <a:latin typeface="Verdana"/>
-              </a:rPr>
-              <a:t>ON ENTEND SOUVENT</a:t>
-            </a:r>
-          </a:p>
-        </p:txBody>
-      </p:sp>
-      <p:sp>
-        <p:nvSpPr>
-          <p:cNvPr id="9" name="TextBox 8"/>
-          <p:cNvSpPr txBox="1"/>
-          <p:nvPr/>
-        </p:nvSpPr>
-        <p:spPr>
-          <a:xfrm>
-            <a:off x="932688" y="2569464"/>
-            <a:ext cx="4696815" cy="1417320"/>
-          </a:xfrm>
-          <a:prstGeom prst="rect">
-            <a:avLst/>
-          </a:prstGeom>
-          <a:noFill/>
-        </p:spPr>
-        <p:txBody>
-          <a:bodyPr wrap="square" lIns="0" rIns="0" tIns="0" bIns="0" anchor="t">
-            <a:spAutoFit/>
-          </a:bodyPr>
-          <a:lstStyle/>
-          <a:p>
-            <a:pPr algn="l">
-              <a:lnSpc>
-                <a:spcPct val="130000"/>
-              </a:lnSpc>
-            </a:pPr>
-            <a:r>
-              <a:rPr sz="2500" b="1" i="0">
-                <a:solidFill>
-                  <a:srgbClr val="17181A"/>
-                </a:solidFill>
-                <a:latin typeface="Verdana"/>
-              </a:rPr>
-              <a:t>J'ai mal à la tête depuis deux semaines, je vais à l'urgence.</a:t>
-            </a:r>
-          </a:p>
-        </p:txBody>
-      </p:sp>
-      <p:sp>
-        <p:nvSpPr>
-          <p:cNvPr id="10" name="Rounded Rectangle 9"/>
+              <a:rPr sz="1800" b="0" i="0">
+                <a:solidFill>
+                  <a:srgbClr val="6E7175"/>
+                </a:solidFill>
+                <a:latin typeface="Verdana"/>
+              </a:rPr>
+              <a:t>Correction — on lit la réponse, on ne commente pas l'erreur.</a:t>
+            </a:r>
+          </a:p>
+        </p:txBody>
+      </p:sp>
+      <p:sp>
+        <p:nvSpPr>
+          <p:cNvPr id="8" name="Rounded Rectangle 7"/>
           <p:cNvSpPr/>
           <p:nvPr/>
         </p:nvSpPr>
         <p:spPr>
           <a:xfrm>
-            <a:off x="6196431" y="1856232"/>
-            <a:ext cx="5428335" cy="2331720"/>
+            <a:off x="566928" y="2139696"/>
+            <a:ext cx="11057839" cy="559816"/>
           </a:xfrm>
           <a:prstGeom prst="roundRect">
             <a:avLst>
-              <a:gd name="adj" fmla="val 6274"/>
+              <a:gd name="adj" fmla="val 26134"/>
             </a:avLst>
           </a:prstGeom>
           <a:solidFill>
             <a:srgbClr val="E6F5EE"/>
-          </a:solidFill>
-          <a:ln w="12700">
-            <a:solidFill>
-              <a:srgbClr val="0A8F5B"/>
-            </a:solidFill>
-          </a:ln>
-          <a:effectLst/>
-        </p:spPr>
-        <p:style>
-          <a:lnRef idx="1">
-            <a:schemeClr val="accent1"/>
-          </a:lnRef>
-          <a:fillRef idx="3">
-            <a:schemeClr val="accent1"/>
-          </a:fillRef>
-          <a:effectRef idx="2">
-            <a:schemeClr val="accent1"/>
-          </a:effectRef>
-          <a:fontRef idx="minor">
-            <a:schemeClr val="lt1"/>
-          </a:fontRef>
-        </p:style>
-        <p:txBody>
-          <a:bodyPr rtlCol="0" anchor="ctr"/>
-          <a:lstStyle/>
-          <a:p/>
-        </p:txBody>
-      </p:sp>
-      <p:sp>
-        <p:nvSpPr>
-          <p:cNvPr id="11" name="TextBox 10"/>
-          <p:cNvSpPr txBox="1"/>
-          <p:nvPr/>
-        </p:nvSpPr>
-        <p:spPr>
-          <a:xfrm>
-            <a:off x="6562191" y="2130552"/>
-            <a:ext cx="4696815" cy="274320"/>
-          </a:xfrm>
-          <a:prstGeom prst="rect">
-            <a:avLst/>
-          </a:prstGeom>
-          <a:noFill/>
-        </p:spPr>
-        <p:txBody>
-          <a:bodyPr wrap="square" lIns="0" rIns="0" tIns="0" bIns="0" anchor="t">
-            <a:spAutoFit/>
-          </a:bodyPr>
-          <a:lstStyle/>
-          <a:p>
-            <a:pPr algn="l">
-              <a:lnSpc>
-                <a:spcPct val="135000"/>
-              </a:lnSpc>
-            </a:pPr>
-            <a:r>
-              <a:rPr sz="1300" b="1" i="0" spc="156">
-                <a:solidFill>
-                  <a:srgbClr val="07734A"/>
-                </a:solidFill>
-                <a:latin typeface="Verdana"/>
-              </a:rPr>
-              <a:t>IL FAUT DIRE PLUTÔT</a:t>
-            </a:r>
-          </a:p>
-        </p:txBody>
-      </p:sp>
-      <p:sp>
-        <p:nvSpPr>
-          <p:cNvPr id="12" name="TextBox 11"/>
-          <p:cNvSpPr txBox="1"/>
-          <p:nvPr/>
-        </p:nvSpPr>
-        <p:spPr>
-          <a:xfrm>
-            <a:off x="6562191" y="2569464"/>
-            <a:ext cx="4696815" cy="1417320"/>
-          </a:xfrm>
-          <a:prstGeom prst="rect">
-            <a:avLst/>
-          </a:prstGeom>
-          <a:noFill/>
-        </p:spPr>
-        <p:txBody>
-          <a:bodyPr wrap="square" lIns="0" rIns="0" tIns="0" bIns="0" anchor="t">
-            <a:spAutoFit/>
-          </a:bodyPr>
-          <a:lstStyle/>
-          <a:p>
-            <a:pPr algn="l">
-              <a:lnSpc>
-                <a:spcPct val="130000"/>
-              </a:lnSpc>
-            </a:pPr>
-            <a:r>
-              <a:rPr sz="2500" b="1" i="0">
-                <a:solidFill>
-                  <a:srgbClr val="17181A"/>
-                </a:solidFill>
-                <a:latin typeface="Verdana"/>
-              </a:rPr>
-              <a:t>J'ai mal à la tête depuis deux semaines, j'appelle la clinique.</a:t>
-            </a:r>
-          </a:p>
-        </p:txBody>
-      </p:sp>
-      <p:sp>
-        <p:nvSpPr>
-          <p:cNvPr id="13" name="Rounded Rectangle 12"/>
-          <p:cNvSpPr/>
-          <p:nvPr/>
-        </p:nvSpPr>
-        <p:spPr>
-          <a:xfrm>
-            <a:off x="566928" y="4462272"/>
-            <a:ext cx="11057839" cy="1618487"/>
-          </a:xfrm>
-          <a:prstGeom prst="roundRect">
-            <a:avLst>
-              <a:gd name="adj" fmla="val 9039"/>
-            </a:avLst>
-          </a:prstGeom>
-          <a:solidFill>
-            <a:srgbClr val="FFFFFF"/>
           </a:solidFill>
           <a:ln w="12700">
             <a:solidFill>
@@ -5045,14 +4907,58 @@
       </p:sp>
       <p:sp>
         <p:nvSpPr>
-          <p:cNvPr id="14" name="TextBox 13"/>
+          <p:cNvPr id="9" name="Rounded Rectangle 8"/>
+          <p:cNvSpPr/>
+          <p:nvPr/>
+        </p:nvSpPr>
+        <p:spPr>
+          <a:xfrm>
+            <a:off x="841247" y="2236724"/>
+            <a:ext cx="365760" cy="365760"/>
+          </a:xfrm>
+          <a:prstGeom prst="roundRect">
+            <a:avLst>
+              <a:gd name="adj" fmla="val 32500"/>
+            </a:avLst>
+          </a:prstGeom>
+          <a:solidFill>
+            <a:srgbClr val="E7F0F6"/>
+          </a:solidFill>
+          <a:ln>
+            <a:noFill/>
+          </a:ln>
+          <a:effectLst/>
+        </p:spPr>
+        <p:style>
+          <a:lnRef idx="1">
+            <a:schemeClr val="accent1"/>
+          </a:lnRef>
+          <a:fillRef idx="3">
+            <a:schemeClr val="accent1"/>
+          </a:fillRef>
+          <a:effectRef idx="2">
+            <a:schemeClr val="accent1"/>
+          </a:effectRef>
+          <a:fontRef idx="minor">
+            <a:schemeClr val="lt1"/>
+          </a:fontRef>
+        </p:style>
+        <p:txBody>
+          <a:bodyPr rtlCol="0" anchor="ctr"/>
+          <a:lstStyle/>
+          <a:p/>
+        </p:txBody>
+      </p:sp>
+      <p:sp>
+        <p:nvSpPr>
+          <p:cNvPr id="10" name="TextBox 9"/>
           <p:cNvSpPr txBox="1"/>
           <p:nvPr/>
         </p:nvSpPr>
         <p:spPr>
           <a:xfrm>
-            <a:off x="969264" y="4736592"/>
-            <a:ext cx="10234879" cy="1150620"/>
+            <a:off x="841247" y="2300732"/>
+            <a:ext cx="365760" cy="256032"/>
           </a:xfrm>
           <a:prstGeom prst="rect">
             <a:avLst/>
@@ -5065,19 +4971,952 @@
           </a:bodyPr>
           <a:lstStyle/>
           <a:p>
+            <a:pPr algn="ctr">
+              <a:lnSpc>
+                <a:spcPct val="135000"/>
+              </a:lnSpc>
+            </a:pPr>
+            <a:r>
+              <a:rPr sz="1500" b="1" i="0">
+                <a:solidFill>
+                  <a:srgbClr val="1D6B8F"/>
+                </a:solidFill>
+                <a:latin typeface="Verdana"/>
+              </a:rPr>
+              <a:t>1</a:t>
+            </a:r>
+          </a:p>
+        </p:txBody>
+      </p:sp>
+      <p:sp>
+        <p:nvSpPr>
+          <p:cNvPr id="11" name="TextBox 10"/>
+          <p:cNvSpPr txBox="1"/>
+          <p:nvPr/>
+        </p:nvSpPr>
+        <p:spPr>
+          <a:xfrm>
+            <a:off x="1344168" y="2295144"/>
+            <a:ext cx="10097719" cy="285496"/>
+          </a:xfrm>
+          <a:prstGeom prst="rect">
+            <a:avLst/>
+          </a:prstGeom>
+          <a:noFill/>
+        </p:spPr>
+        <p:txBody>
+          <a:bodyPr wrap="square" lIns="0" rIns="0" tIns="0" bIns="0" anchor="t">
+            <a:spAutoFit/>
+          </a:bodyPr>
+          <a:lstStyle/>
+          <a:p>
             <a:pPr algn="l">
               <a:lnSpc>
-                <a:spcPct val="145000"/>
+                <a:spcPct val="140000"/>
               </a:lnSpc>
             </a:pPr>
             <a:r>
-              <a:rPr sz="2000" b="0" i="0">
-                <a:solidFill>
-                  <a:srgbClr val="4B4F52"/>
-                </a:solidFill>
-                <a:latin typeface="Verdana"/>
-              </a:rPr>
-              <a:t>L'urgence est faite pour ce qui met la vie en danger maintenant. Un problème qui dure depuis deux semaines y sera classé en dernier : l'attente peut dépasser huit heures, et le médecin de la clinique aurait votre dossier.</a:t>
+              <a:rPr sz="1400" b="0" i="0">
+                <a:solidFill>
+                  <a:srgbClr val="3A3D40"/>
+                </a:solidFill>
+                <a:latin typeface="Verdana"/>
+              </a:rPr>
+              <a:t>Vous toussez depuis trois jours, sans fièvre.   </a:t>
+            </a:r>
+            <a:r>
+              <a:rPr sz="1400" b="1" i="0">
+                <a:solidFill>
+                  <a:srgbClr val="07734A"/>
+                </a:solidFill>
+                <a:latin typeface="Verdana"/>
+              </a:rPr>
+              <a:t>» la pharmacie d'abord, ou 811 si ça inquiète</a:t>
+            </a:r>
+          </a:p>
+        </p:txBody>
+      </p:sp>
+      <p:sp>
+        <p:nvSpPr>
+          <p:cNvPr id="12" name="Rounded Rectangle 11"/>
+          <p:cNvSpPr/>
+          <p:nvPr/>
+        </p:nvSpPr>
+        <p:spPr>
+          <a:xfrm>
+            <a:off x="566928" y="2827528"/>
+            <a:ext cx="11057839" cy="559816"/>
+          </a:xfrm>
+          <a:prstGeom prst="roundRect">
+            <a:avLst>
+              <a:gd name="adj" fmla="val 26134"/>
+            </a:avLst>
+          </a:prstGeom>
+          <a:solidFill>
+            <a:srgbClr val="E6F5EE"/>
+          </a:solidFill>
+          <a:ln w="12700">
+            <a:solidFill>
+              <a:srgbClr val="EAEAE8"/>
+            </a:solidFill>
+          </a:ln>
+          <a:effectLst/>
+        </p:spPr>
+        <p:style>
+          <a:lnRef idx="1">
+            <a:schemeClr val="accent1"/>
+          </a:lnRef>
+          <a:fillRef idx="3">
+            <a:schemeClr val="accent1"/>
+          </a:fillRef>
+          <a:effectRef idx="2">
+            <a:schemeClr val="accent1"/>
+          </a:effectRef>
+          <a:fontRef idx="minor">
+            <a:schemeClr val="lt1"/>
+          </a:fontRef>
+        </p:style>
+        <p:txBody>
+          <a:bodyPr rtlCol="0" anchor="ctr"/>
+          <a:lstStyle/>
+          <a:p/>
+        </p:txBody>
+      </p:sp>
+      <p:sp>
+        <p:nvSpPr>
+          <p:cNvPr id="13" name="Rounded Rectangle 12"/>
+          <p:cNvSpPr/>
+          <p:nvPr/>
+        </p:nvSpPr>
+        <p:spPr>
+          <a:xfrm>
+            <a:off x="841247" y="2924556"/>
+            <a:ext cx="365760" cy="365760"/>
+          </a:xfrm>
+          <a:prstGeom prst="roundRect">
+            <a:avLst>
+              <a:gd name="adj" fmla="val 32500"/>
+            </a:avLst>
+          </a:prstGeom>
+          <a:solidFill>
+            <a:srgbClr val="E7F0F6"/>
+          </a:solidFill>
+          <a:ln>
+            <a:noFill/>
+          </a:ln>
+          <a:effectLst/>
+        </p:spPr>
+        <p:style>
+          <a:lnRef idx="1">
+            <a:schemeClr val="accent1"/>
+          </a:lnRef>
+          <a:fillRef idx="3">
+            <a:schemeClr val="accent1"/>
+          </a:fillRef>
+          <a:effectRef idx="2">
+            <a:schemeClr val="accent1"/>
+          </a:effectRef>
+          <a:fontRef idx="minor">
+            <a:schemeClr val="lt1"/>
+          </a:fontRef>
+        </p:style>
+        <p:txBody>
+          <a:bodyPr rtlCol="0" anchor="ctr"/>
+          <a:lstStyle/>
+          <a:p/>
+        </p:txBody>
+      </p:sp>
+      <p:sp>
+        <p:nvSpPr>
+          <p:cNvPr id="14" name="TextBox 13"/>
+          <p:cNvSpPr txBox="1"/>
+          <p:nvPr/>
+        </p:nvSpPr>
+        <p:spPr>
+          <a:xfrm>
+            <a:off x="841247" y="2988564"/>
+            <a:ext cx="365760" cy="256032"/>
+          </a:xfrm>
+          <a:prstGeom prst="rect">
+            <a:avLst/>
+          </a:prstGeom>
+          <a:noFill/>
+        </p:spPr>
+        <p:txBody>
+          <a:bodyPr wrap="square" lIns="0" rIns="0" tIns="0" bIns="0" anchor="t">
+            <a:spAutoFit/>
+          </a:bodyPr>
+          <a:lstStyle/>
+          <a:p>
+            <a:pPr algn="ctr">
+              <a:lnSpc>
+                <a:spcPct val="135000"/>
+              </a:lnSpc>
+            </a:pPr>
+            <a:r>
+              <a:rPr sz="1500" b="1" i="0">
+                <a:solidFill>
+                  <a:srgbClr val="1D6B8F"/>
+                </a:solidFill>
+                <a:latin typeface="Verdana"/>
+              </a:rPr>
+              <a:t>2</a:t>
+            </a:r>
+          </a:p>
+        </p:txBody>
+      </p:sp>
+      <p:sp>
+        <p:nvSpPr>
+          <p:cNvPr id="15" name="TextBox 14"/>
+          <p:cNvSpPr txBox="1"/>
+          <p:nvPr/>
+        </p:nvSpPr>
+        <p:spPr>
+          <a:xfrm>
+            <a:off x="1344168" y="2982975"/>
+            <a:ext cx="10097719" cy="285496"/>
+          </a:xfrm>
+          <a:prstGeom prst="rect">
+            <a:avLst/>
+          </a:prstGeom>
+          <a:noFill/>
+        </p:spPr>
+        <p:txBody>
+          <a:bodyPr wrap="square" lIns="0" rIns="0" tIns="0" bIns="0" anchor="t">
+            <a:spAutoFit/>
+          </a:bodyPr>
+          <a:lstStyle/>
+          <a:p>
+            <a:pPr algn="l">
+              <a:lnSpc>
+                <a:spcPct val="140000"/>
+              </a:lnSpc>
+            </a:pPr>
+            <a:r>
+              <a:rPr sz="1400" b="0" i="0">
+                <a:solidFill>
+                  <a:srgbClr val="3A3D40"/>
+                </a:solidFill>
+                <a:latin typeface="Verdana"/>
+              </a:rPr>
+              <a:t>Votre voisin ne répond plus et respire mal.   </a:t>
+            </a:r>
+            <a:r>
+              <a:rPr sz="1400" b="1" i="0">
+                <a:solidFill>
+                  <a:srgbClr val="07734A"/>
+                </a:solidFill>
+                <a:latin typeface="Verdana"/>
+              </a:rPr>
+              <a:t>» le 911, tout de suite</a:t>
+            </a:r>
+          </a:p>
+        </p:txBody>
+      </p:sp>
+      <p:sp>
+        <p:nvSpPr>
+          <p:cNvPr id="16" name="Rounded Rectangle 15"/>
+          <p:cNvSpPr/>
+          <p:nvPr/>
+        </p:nvSpPr>
+        <p:spPr>
+          <a:xfrm>
+            <a:off x="566928" y="3515359"/>
+            <a:ext cx="11057839" cy="559816"/>
+          </a:xfrm>
+          <a:prstGeom prst="roundRect">
+            <a:avLst>
+              <a:gd name="adj" fmla="val 26134"/>
+            </a:avLst>
+          </a:prstGeom>
+          <a:solidFill>
+            <a:srgbClr val="E6F5EE"/>
+          </a:solidFill>
+          <a:ln w="12700">
+            <a:solidFill>
+              <a:srgbClr val="EAEAE8"/>
+            </a:solidFill>
+          </a:ln>
+          <a:effectLst/>
+        </p:spPr>
+        <p:style>
+          <a:lnRef idx="1">
+            <a:schemeClr val="accent1"/>
+          </a:lnRef>
+          <a:fillRef idx="3">
+            <a:schemeClr val="accent1"/>
+          </a:fillRef>
+          <a:effectRef idx="2">
+            <a:schemeClr val="accent1"/>
+          </a:effectRef>
+          <a:fontRef idx="minor">
+            <a:schemeClr val="lt1"/>
+          </a:fontRef>
+        </p:style>
+        <p:txBody>
+          <a:bodyPr rtlCol="0" anchor="ctr"/>
+          <a:lstStyle/>
+          <a:p/>
+        </p:txBody>
+      </p:sp>
+      <p:sp>
+        <p:nvSpPr>
+          <p:cNvPr id="17" name="Rounded Rectangle 16"/>
+          <p:cNvSpPr/>
+          <p:nvPr/>
+        </p:nvSpPr>
+        <p:spPr>
+          <a:xfrm>
+            <a:off x="841247" y="3612388"/>
+            <a:ext cx="365760" cy="365760"/>
+          </a:xfrm>
+          <a:prstGeom prst="roundRect">
+            <a:avLst>
+              <a:gd name="adj" fmla="val 32500"/>
+            </a:avLst>
+          </a:prstGeom>
+          <a:solidFill>
+            <a:srgbClr val="E7F0F6"/>
+          </a:solidFill>
+          <a:ln>
+            <a:noFill/>
+          </a:ln>
+          <a:effectLst/>
+        </p:spPr>
+        <p:style>
+          <a:lnRef idx="1">
+            <a:schemeClr val="accent1"/>
+          </a:lnRef>
+          <a:fillRef idx="3">
+            <a:schemeClr val="accent1"/>
+          </a:fillRef>
+          <a:effectRef idx="2">
+            <a:schemeClr val="accent1"/>
+          </a:effectRef>
+          <a:fontRef idx="minor">
+            <a:schemeClr val="lt1"/>
+          </a:fontRef>
+        </p:style>
+        <p:txBody>
+          <a:bodyPr rtlCol="0" anchor="ctr"/>
+          <a:lstStyle/>
+          <a:p/>
+        </p:txBody>
+      </p:sp>
+      <p:sp>
+        <p:nvSpPr>
+          <p:cNvPr id="18" name="TextBox 17"/>
+          <p:cNvSpPr txBox="1"/>
+          <p:nvPr/>
+        </p:nvSpPr>
+        <p:spPr>
+          <a:xfrm>
+            <a:off x="841247" y="3676395"/>
+            <a:ext cx="365760" cy="256032"/>
+          </a:xfrm>
+          <a:prstGeom prst="rect">
+            <a:avLst/>
+          </a:prstGeom>
+          <a:noFill/>
+        </p:spPr>
+        <p:txBody>
+          <a:bodyPr wrap="square" lIns="0" rIns="0" tIns="0" bIns="0" anchor="t">
+            <a:spAutoFit/>
+          </a:bodyPr>
+          <a:lstStyle/>
+          <a:p>
+            <a:pPr algn="ctr">
+              <a:lnSpc>
+                <a:spcPct val="135000"/>
+              </a:lnSpc>
+            </a:pPr>
+            <a:r>
+              <a:rPr sz="1500" b="1" i="0">
+                <a:solidFill>
+                  <a:srgbClr val="1D6B8F"/>
+                </a:solidFill>
+                <a:latin typeface="Verdana"/>
+              </a:rPr>
+              <a:t>3</a:t>
+            </a:r>
+          </a:p>
+        </p:txBody>
+      </p:sp>
+      <p:sp>
+        <p:nvSpPr>
+          <p:cNvPr id="19" name="TextBox 18"/>
+          <p:cNvSpPr txBox="1"/>
+          <p:nvPr/>
+        </p:nvSpPr>
+        <p:spPr>
+          <a:xfrm>
+            <a:off x="1344168" y="3670807"/>
+            <a:ext cx="10097719" cy="285496"/>
+          </a:xfrm>
+          <a:prstGeom prst="rect">
+            <a:avLst/>
+          </a:prstGeom>
+          <a:noFill/>
+        </p:spPr>
+        <p:txBody>
+          <a:bodyPr wrap="square" lIns="0" rIns="0" tIns="0" bIns="0" anchor="t">
+            <a:spAutoFit/>
+          </a:bodyPr>
+          <a:lstStyle/>
+          <a:p>
+            <a:pPr algn="l">
+              <a:lnSpc>
+                <a:spcPct val="140000"/>
+              </a:lnSpc>
+            </a:pPr>
+            <a:r>
+              <a:rPr sz="1400" b="0" i="0">
+                <a:solidFill>
+                  <a:srgbClr val="3A3D40"/>
+                </a:solidFill>
+                <a:latin typeface="Verdana"/>
+              </a:rPr>
+              <a:t>Vous avez besoin d'un billet du médecin pour votre employeur.   </a:t>
+            </a:r>
+            <a:r>
+              <a:rPr sz="1400" b="1" i="0">
+                <a:solidFill>
+                  <a:srgbClr val="07734A"/>
+                </a:solidFill>
+                <a:latin typeface="Verdana"/>
+              </a:rPr>
+              <a:t>» la clinique, avec rendez-vous</a:t>
+            </a:r>
+          </a:p>
+        </p:txBody>
+      </p:sp>
+      <p:sp>
+        <p:nvSpPr>
+          <p:cNvPr id="20" name="Rounded Rectangle 19"/>
+          <p:cNvSpPr/>
+          <p:nvPr/>
+        </p:nvSpPr>
+        <p:spPr>
+          <a:xfrm>
+            <a:off x="566928" y="4203192"/>
+            <a:ext cx="11057839" cy="808735"/>
+          </a:xfrm>
+          <a:prstGeom prst="roundRect">
+            <a:avLst>
+              <a:gd name="adj" fmla="val 18090"/>
+            </a:avLst>
+          </a:prstGeom>
+          <a:solidFill>
+            <a:srgbClr val="E6F5EE"/>
+          </a:solidFill>
+          <a:ln w="12700">
+            <a:solidFill>
+              <a:srgbClr val="EAEAE8"/>
+            </a:solidFill>
+          </a:ln>
+          <a:effectLst/>
+        </p:spPr>
+        <p:style>
+          <a:lnRef idx="1">
+            <a:schemeClr val="accent1"/>
+          </a:lnRef>
+          <a:fillRef idx="3">
+            <a:schemeClr val="accent1"/>
+          </a:fillRef>
+          <a:effectRef idx="2">
+            <a:schemeClr val="accent1"/>
+          </a:effectRef>
+          <a:fontRef idx="minor">
+            <a:schemeClr val="lt1"/>
+          </a:fontRef>
+        </p:style>
+        <p:txBody>
+          <a:bodyPr rtlCol="0" anchor="ctr"/>
+          <a:lstStyle/>
+          <a:p/>
+        </p:txBody>
+      </p:sp>
+      <p:sp>
+        <p:nvSpPr>
+          <p:cNvPr id="21" name="Rounded Rectangle 20"/>
+          <p:cNvSpPr/>
+          <p:nvPr/>
+        </p:nvSpPr>
+        <p:spPr>
+          <a:xfrm>
+            <a:off x="841247" y="4424680"/>
+            <a:ext cx="365760" cy="365760"/>
+          </a:xfrm>
+          <a:prstGeom prst="roundRect">
+            <a:avLst>
+              <a:gd name="adj" fmla="val 32500"/>
+            </a:avLst>
+          </a:prstGeom>
+          <a:solidFill>
+            <a:srgbClr val="E7F0F6"/>
+          </a:solidFill>
+          <a:ln>
+            <a:noFill/>
+          </a:ln>
+          <a:effectLst/>
+        </p:spPr>
+        <p:style>
+          <a:lnRef idx="1">
+            <a:schemeClr val="accent1"/>
+          </a:lnRef>
+          <a:fillRef idx="3">
+            <a:schemeClr val="accent1"/>
+          </a:fillRef>
+          <a:effectRef idx="2">
+            <a:schemeClr val="accent1"/>
+          </a:effectRef>
+          <a:fontRef idx="minor">
+            <a:schemeClr val="lt1"/>
+          </a:fontRef>
+        </p:style>
+        <p:txBody>
+          <a:bodyPr rtlCol="0" anchor="ctr"/>
+          <a:lstStyle/>
+          <a:p/>
+        </p:txBody>
+      </p:sp>
+      <p:sp>
+        <p:nvSpPr>
+          <p:cNvPr id="22" name="TextBox 21"/>
+          <p:cNvSpPr txBox="1"/>
+          <p:nvPr/>
+        </p:nvSpPr>
+        <p:spPr>
+          <a:xfrm>
+            <a:off x="841247" y="4488688"/>
+            <a:ext cx="365760" cy="256032"/>
+          </a:xfrm>
+          <a:prstGeom prst="rect">
+            <a:avLst/>
+          </a:prstGeom>
+          <a:noFill/>
+        </p:spPr>
+        <p:txBody>
+          <a:bodyPr wrap="square" lIns="0" rIns="0" tIns="0" bIns="0" anchor="t">
+            <a:spAutoFit/>
+          </a:bodyPr>
+          <a:lstStyle/>
+          <a:p>
+            <a:pPr algn="ctr">
+              <a:lnSpc>
+                <a:spcPct val="135000"/>
+              </a:lnSpc>
+            </a:pPr>
+            <a:r>
+              <a:rPr sz="1500" b="1" i="0">
+                <a:solidFill>
+                  <a:srgbClr val="1D6B8F"/>
+                </a:solidFill>
+                <a:latin typeface="Verdana"/>
+              </a:rPr>
+              <a:t>4</a:t>
+            </a:r>
+          </a:p>
+        </p:txBody>
+      </p:sp>
+      <p:sp>
+        <p:nvSpPr>
+          <p:cNvPr id="23" name="TextBox 22"/>
+          <p:cNvSpPr txBox="1"/>
+          <p:nvPr/>
+        </p:nvSpPr>
+        <p:spPr>
+          <a:xfrm>
+            <a:off x="1344168" y="4358640"/>
+            <a:ext cx="10097719" cy="534415"/>
+          </a:xfrm>
+          <a:prstGeom prst="rect">
+            <a:avLst/>
+          </a:prstGeom>
+          <a:noFill/>
+        </p:spPr>
+        <p:txBody>
+          <a:bodyPr wrap="square" lIns="0" rIns="0" tIns="0" bIns="0" anchor="t">
+            <a:spAutoFit/>
+          </a:bodyPr>
+          <a:lstStyle/>
+          <a:p>
+            <a:pPr algn="l">
+              <a:lnSpc>
+                <a:spcPct val="140000"/>
+              </a:lnSpc>
+            </a:pPr>
+            <a:r>
+              <a:rPr sz="1400" b="0" i="0">
+                <a:solidFill>
+                  <a:srgbClr val="3A3D40"/>
+                </a:solidFill>
+                <a:latin typeface="Verdana"/>
+              </a:rPr>
+              <a:t>Vous ne savez pas si votre médicament se prend avec du lait.   </a:t>
+            </a:r>
+            <a:r>
+              <a:rPr sz="1400" b="1" i="0">
+                <a:solidFill>
+                  <a:srgbClr val="07734A"/>
+                </a:solidFill>
+                <a:latin typeface="Verdana"/>
+              </a:rPr>
+              <a:t>» la pharmacie — c'est gratuit et sans rendez-vous</a:t>
+            </a:r>
+          </a:p>
+        </p:txBody>
+      </p:sp>
+      <p:sp>
+        <p:nvSpPr>
+          <p:cNvPr id="24" name="Rounded Rectangle 23"/>
+          <p:cNvSpPr/>
+          <p:nvPr/>
+        </p:nvSpPr>
+        <p:spPr>
+          <a:xfrm>
+            <a:off x="566928" y="5139943"/>
+            <a:ext cx="11057839" cy="559816"/>
+          </a:xfrm>
+          <a:prstGeom prst="roundRect">
+            <a:avLst>
+              <a:gd name="adj" fmla="val 26134"/>
+            </a:avLst>
+          </a:prstGeom>
+          <a:solidFill>
+            <a:srgbClr val="E6F5EE"/>
+          </a:solidFill>
+          <a:ln w="12700">
+            <a:solidFill>
+              <a:srgbClr val="EAEAE8"/>
+            </a:solidFill>
+          </a:ln>
+          <a:effectLst/>
+        </p:spPr>
+        <p:style>
+          <a:lnRef idx="1">
+            <a:schemeClr val="accent1"/>
+          </a:lnRef>
+          <a:fillRef idx="3">
+            <a:schemeClr val="accent1"/>
+          </a:fillRef>
+          <a:effectRef idx="2">
+            <a:schemeClr val="accent1"/>
+          </a:effectRef>
+          <a:fontRef idx="minor">
+            <a:schemeClr val="lt1"/>
+          </a:fontRef>
+        </p:style>
+        <p:txBody>
+          <a:bodyPr rtlCol="0" anchor="ctr"/>
+          <a:lstStyle/>
+          <a:p/>
+        </p:txBody>
+      </p:sp>
+      <p:sp>
+        <p:nvSpPr>
+          <p:cNvPr id="25" name="Rounded Rectangle 24"/>
+          <p:cNvSpPr/>
+          <p:nvPr/>
+        </p:nvSpPr>
+        <p:spPr>
+          <a:xfrm>
+            <a:off x="841247" y="5236971"/>
+            <a:ext cx="365760" cy="365760"/>
+          </a:xfrm>
+          <a:prstGeom prst="roundRect">
+            <a:avLst>
+              <a:gd name="adj" fmla="val 32500"/>
+            </a:avLst>
+          </a:prstGeom>
+          <a:solidFill>
+            <a:srgbClr val="E7F0F6"/>
+          </a:solidFill>
+          <a:ln>
+            <a:noFill/>
+          </a:ln>
+          <a:effectLst/>
+        </p:spPr>
+        <p:style>
+          <a:lnRef idx="1">
+            <a:schemeClr val="accent1"/>
+          </a:lnRef>
+          <a:fillRef idx="3">
+            <a:schemeClr val="accent1"/>
+          </a:fillRef>
+          <a:effectRef idx="2">
+            <a:schemeClr val="accent1"/>
+          </a:effectRef>
+          <a:fontRef idx="minor">
+            <a:schemeClr val="lt1"/>
+          </a:fontRef>
+        </p:style>
+        <p:txBody>
+          <a:bodyPr rtlCol="0" anchor="ctr"/>
+          <a:lstStyle/>
+          <a:p/>
+        </p:txBody>
+      </p:sp>
+      <p:sp>
+        <p:nvSpPr>
+          <p:cNvPr id="26" name="TextBox 25"/>
+          <p:cNvSpPr txBox="1"/>
+          <p:nvPr/>
+        </p:nvSpPr>
+        <p:spPr>
+          <a:xfrm>
+            <a:off x="841247" y="5300979"/>
+            <a:ext cx="365760" cy="256032"/>
+          </a:xfrm>
+          <a:prstGeom prst="rect">
+            <a:avLst/>
+          </a:prstGeom>
+          <a:noFill/>
+        </p:spPr>
+        <p:txBody>
+          <a:bodyPr wrap="square" lIns="0" rIns="0" tIns="0" bIns="0" anchor="t">
+            <a:spAutoFit/>
+          </a:bodyPr>
+          <a:lstStyle/>
+          <a:p>
+            <a:pPr algn="ctr">
+              <a:lnSpc>
+                <a:spcPct val="135000"/>
+              </a:lnSpc>
+            </a:pPr>
+            <a:r>
+              <a:rPr sz="1500" b="1" i="0">
+                <a:solidFill>
+                  <a:srgbClr val="1D6B8F"/>
+                </a:solidFill>
+                <a:latin typeface="Verdana"/>
+              </a:rPr>
+              <a:t>5</a:t>
+            </a:r>
+          </a:p>
+        </p:txBody>
+      </p:sp>
+      <p:sp>
+        <p:nvSpPr>
+          <p:cNvPr id="27" name="TextBox 26"/>
+          <p:cNvSpPr txBox="1"/>
+          <p:nvPr/>
+        </p:nvSpPr>
+        <p:spPr>
+          <a:xfrm>
+            <a:off x="1344168" y="5295391"/>
+            <a:ext cx="10097719" cy="285496"/>
+          </a:xfrm>
+          <a:prstGeom prst="rect">
+            <a:avLst/>
+          </a:prstGeom>
+          <a:noFill/>
+        </p:spPr>
+        <p:txBody>
+          <a:bodyPr wrap="square" lIns="0" rIns="0" tIns="0" bIns="0" anchor="t">
+            <a:spAutoFit/>
+          </a:bodyPr>
+          <a:lstStyle/>
+          <a:p>
+            <a:pPr algn="l">
+              <a:lnSpc>
+                <a:spcPct val="140000"/>
+              </a:lnSpc>
+            </a:pPr>
+            <a:r>
+              <a:rPr sz="1400" b="0" i="0">
+                <a:solidFill>
+                  <a:srgbClr val="3A3D40"/>
+                </a:solidFill>
+                <a:latin typeface="Verdana"/>
+              </a:rPr>
+              <a:t>Vous vous êtes coupé le doigt, ça saigne mais peu.   </a:t>
+            </a:r>
+            <a:r>
+              <a:rPr sz="1400" b="1" i="0">
+                <a:solidFill>
+                  <a:srgbClr val="07734A"/>
+                </a:solidFill>
+                <a:latin typeface="Verdana"/>
+              </a:rPr>
+              <a:t>» 811 pour savoir s'il faut des points</a:t>
+            </a:r>
+          </a:p>
+        </p:txBody>
+      </p:sp>
+      <p:sp>
+        <p:nvSpPr>
+          <p:cNvPr id="28" name="Rounded Rectangle 27"/>
+          <p:cNvSpPr/>
+          <p:nvPr/>
+        </p:nvSpPr>
+        <p:spPr>
+          <a:xfrm>
+            <a:off x="566928" y="5827776"/>
+            <a:ext cx="11057839" cy="559816"/>
+          </a:xfrm>
+          <a:prstGeom prst="roundRect">
+            <a:avLst>
+              <a:gd name="adj" fmla="val 26134"/>
+            </a:avLst>
+          </a:prstGeom>
+          <a:solidFill>
+            <a:srgbClr val="E6F5EE"/>
+          </a:solidFill>
+          <a:ln w="12700">
+            <a:solidFill>
+              <a:srgbClr val="EAEAE8"/>
+            </a:solidFill>
+          </a:ln>
+          <a:effectLst/>
+        </p:spPr>
+        <p:style>
+          <a:lnRef idx="1">
+            <a:schemeClr val="accent1"/>
+          </a:lnRef>
+          <a:fillRef idx="3">
+            <a:schemeClr val="accent1"/>
+          </a:fillRef>
+          <a:effectRef idx="2">
+            <a:schemeClr val="accent1"/>
+          </a:effectRef>
+          <a:fontRef idx="minor">
+            <a:schemeClr val="lt1"/>
+          </a:fontRef>
+        </p:style>
+        <p:txBody>
+          <a:bodyPr rtlCol="0" anchor="ctr"/>
+          <a:lstStyle/>
+          <a:p/>
+        </p:txBody>
+      </p:sp>
+      <p:sp>
+        <p:nvSpPr>
+          <p:cNvPr id="29" name="Rounded Rectangle 28"/>
+          <p:cNvSpPr/>
+          <p:nvPr/>
+        </p:nvSpPr>
+        <p:spPr>
+          <a:xfrm>
+            <a:off x="841247" y="5924803"/>
+            <a:ext cx="365760" cy="365760"/>
+          </a:xfrm>
+          <a:prstGeom prst="roundRect">
+            <a:avLst>
+              <a:gd name="adj" fmla="val 32500"/>
+            </a:avLst>
+          </a:prstGeom>
+          <a:solidFill>
+            <a:srgbClr val="E7F0F6"/>
+          </a:solidFill>
+          <a:ln>
+            <a:noFill/>
+          </a:ln>
+          <a:effectLst/>
+        </p:spPr>
+        <p:style>
+          <a:lnRef idx="1">
+            <a:schemeClr val="accent1"/>
+          </a:lnRef>
+          <a:fillRef idx="3">
+            <a:schemeClr val="accent1"/>
+          </a:fillRef>
+          <a:effectRef idx="2">
+            <a:schemeClr val="accent1"/>
+          </a:effectRef>
+          <a:fontRef idx="minor">
+            <a:schemeClr val="lt1"/>
+          </a:fontRef>
+        </p:style>
+        <p:txBody>
+          <a:bodyPr rtlCol="0" anchor="ctr"/>
+          <a:lstStyle/>
+          <a:p/>
+        </p:txBody>
+      </p:sp>
+      <p:sp>
+        <p:nvSpPr>
+          <p:cNvPr id="30" name="TextBox 29"/>
+          <p:cNvSpPr txBox="1"/>
+          <p:nvPr/>
+        </p:nvSpPr>
+        <p:spPr>
+          <a:xfrm>
+            <a:off x="841247" y="5988812"/>
+            <a:ext cx="365760" cy="256032"/>
+          </a:xfrm>
+          <a:prstGeom prst="rect">
+            <a:avLst/>
+          </a:prstGeom>
+          <a:noFill/>
+        </p:spPr>
+        <p:txBody>
+          <a:bodyPr wrap="square" lIns="0" rIns="0" tIns="0" bIns="0" anchor="t">
+            <a:spAutoFit/>
+          </a:bodyPr>
+          <a:lstStyle/>
+          <a:p>
+            <a:pPr algn="ctr">
+              <a:lnSpc>
+                <a:spcPct val="135000"/>
+              </a:lnSpc>
+            </a:pPr>
+            <a:r>
+              <a:rPr sz="1500" b="1" i="0">
+                <a:solidFill>
+                  <a:srgbClr val="1D6B8F"/>
+                </a:solidFill>
+                <a:latin typeface="Verdana"/>
+              </a:rPr>
+              <a:t>6</a:t>
+            </a:r>
+          </a:p>
+        </p:txBody>
+      </p:sp>
+      <p:sp>
+        <p:nvSpPr>
+          <p:cNvPr id="31" name="TextBox 30"/>
+          <p:cNvSpPr txBox="1"/>
+          <p:nvPr/>
+        </p:nvSpPr>
+        <p:spPr>
+          <a:xfrm>
+            <a:off x="1344168" y="5983224"/>
+            <a:ext cx="10097719" cy="285496"/>
+          </a:xfrm>
+          <a:prstGeom prst="rect">
+            <a:avLst/>
+          </a:prstGeom>
+          <a:noFill/>
+        </p:spPr>
+        <p:txBody>
+          <a:bodyPr wrap="square" lIns="0" rIns="0" tIns="0" bIns="0" anchor="t">
+            <a:spAutoFit/>
+          </a:bodyPr>
+          <a:lstStyle/>
+          <a:p>
+            <a:pPr algn="l">
+              <a:lnSpc>
+                <a:spcPct val="140000"/>
+              </a:lnSpc>
+            </a:pPr>
+            <a:r>
+              <a:rPr sz="1400" b="0" i="0">
+                <a:solidFill>
+                  <a:srgbClr val="3A3D40"/>
+                </a:solidFill>
+                <a:latin typeface="Verdana"/>
+              </a:rPr>
+              <a:t>Votre fille a la même fièvre depuis quatre jours.   </a:t>
+            </a:r>
+            <a:r>
+              <a:rPr sz="1400" b="1" i="0">
+                <a:solidFill>
+                  <a:srgbClr val="07734A"/>
+                </a:solidFill>
+                <a:latin typeface="Verdana"/>
+              </a:rPr>
+              <a:t>» la clinique ou le sans rendez-vous</a:t>
             </a:r>
           </a:p>
         </p:txBody>
@@ -5254,7 +6093,7 @@
                 </a:solidFill>
                 <a:latin typeface="Verdana"/>
               </a:rPr>
-              <a:t>PRATIQUE · 3 DE 3</a:t>
+              <a:t>LE PIÈGE DE L'URGENCE</a:t>
             </a:r>
           </a:p>
         </p:txBody>
@@ -5293,21 +6132,67 @@
                 </a:solidFill>
                 <a:latin typeface="Verdana"/>
               </a:rPr>
-              <a:t>Votre carnet de numéros</a:t>
-            </a:r>
-          </a:p>
-        </p:txBody>
-      </p:sp>
-      <p:sp>
-        <p:nvSpPr>
-          <p:cNvPr id="7" name="TextBox 6"/>
+              <a:t>Le piège le plus fréquent</a:t>
+            </a:r>
+          </a:p>
+        </p:txBody>
+      </p:sp>
+      <p:sp>
+        <p:nvSpPr>
+          <p:cNvPr id="7" name="Rounded Rectangle 6"/>
+          <p:cNvSpPr/>
+          <p:nvPr/>
+        </p:nvSpPr>
+        <p:spPr>
+          <a:xfrm>
+            <a:off x="566928" y="1856232"/>
+            <a:ext cx="5428335" cy="2331720"/>
+          </a:xfrm>
+          <a:prstGeom prst="roundRect">
+            <a:avLst>
+              <a:gd name="adj" fmla="val 6274"/>
+            </a:avLst>
+          </a:prstGeom>
+          <a:solidFill>
+            <a:srgbClr val="FFF6F5"/>
+          </a:solidFill>
+          <a:ln w="12700">
+            <a:solidFill>
+              <a:srgbClr val="DC2626"/>
+            </a:solidFill>
+          </a:ln>
+          <a:effectLst/>
+        </p:spPr>
+        <p:style>
+          <a:lnRef idx="1">
+            <a:schemeClr val="accent1"/>
+          </a:lnRef>
+          <a:fillRef idx="3">
+            <a:schemeClr val="accent1"/>
+          </a:fillRef>
+          <a:effectRef idx="2">
+            <a:schemeClr val="accent1"/>
+          </a:effectRef>
+          <a:fontRef idx="minor">
+            <a:schemeClr val="lt1"/>
+          </a:fontRef>
+        </p:style>
+        <p:txBody>
+          <a:bodyPr rtlCol="0" anchor="ctr"/>
+          <a:lstStyle/>
+          <a:p/>
+        </p:txBody>
+      </p:sp>
+      <p:sp>
+        <p:nvSpPr>
+          <p:cNvPr id="8" name="TextBox 7"/>
           <p:cNvSpPr txBox="1"/>
           <p:nvPr/>
         </p:nvSpPr>
         <p:spPr>
           <a:xfrm>
-            <a:off x="566928" y="1645920"/>
-            <a:ext cx="11057839" cy="329184"/>
+            <a:off x="932688" y="2130552"/>
+            <a:ext cx="4696815" cy="274320"/>
           </a:xfrm>
           <a:prstGeom prst="rect">
             <a:avLst/>
@@ -5326,31 +6211,194 @@
               </a:lnSpc>
             </a:pPr>
             <a:r>
-              <a:rPr sz="1800" b="0" i="0">
-                <a:solidFill>
-                  <a:srgbClr val="6E7175"/>
-                </a:solidFill>
-                <a:latin typeface="Verdana"/>
-              </a:rPr>
-              <a:t>Écrivez les coordonnées de vos propres ressources.</a:t>
-            </a:r>
-          </a:p>
-        </p:txBody>
-      </p:sp>
-      <p:sp>
-        <p:nvSpPr>
-          <p:cNvPr id="8" name="Rounded Rectangle 7"/>
+              <a:rPr sz="1300" b="1" i="0" spc="156">
+                <a:solidFill>
+                  <a:srgbClr val="B91C1C"/>
+                </a:solidFill>
+                <a:latin typeface="Verdana"/>
+              </a:rPr>
+              <a:t>ON ENTEND SOUVENT</a:t>
+            </a:r>
+          </a:p>
+        </p:txBody>
+      </p:sp>
+      <p:sp>
+        <p:nvSpPr>
+          <p:cNvPr id="9" name="TextBox 8"/>
+          <p:cNvSpPr txBox="1"/>
+          <p:nvPr/>
+        </p:nvSpPr>
+        <p:spPr>
+          <a:xfrm>
+            <a:off x="932688" y="2569464"/>
+            <a:ext cx="4696815" cy="1417320"/>
+          </a:xfrm>
+          <a:prstGeom prst="rect">
+            <a:avLst/>
+          </a:prstGeom>
+          <a:noFill/>
+        </p:spPr>
+        <p:txBody>
+          <a:bodyPr wrap="square" lIns="0" rIns="0" tIns="0" bIns="0" anchor="t">
+            <a:spAutoFit/>
+          </a:bodyPr>
+          <a:lstStyle/>
+          <a:p>
+            <a:pPr algn="l">
+              <a:lnSpc>
+                <a:spcPct val="130000"/>
+              </a:lnSpc>
+            </a:pPr>
+            <a:r>
+              <a:rPr sz="2500" b="1" i="0">
+                <a:solidFill>
+                  <a:srgbClr val="17181A"/>
+                </a:solidFill>
+                <a:latin typeface="Verdana"/>
+              </a:rPr>
+              <a:t>J'ai mal à la tête depuis deux semaines, je vais à l'urgence.</a:t>
+            </a:r>
+          </a:p>
+        </p:txBody>
+      </p:sp>
+      <p:sp>
+        <p:nvSpPr>
+          <p:cNvPr id="10" name="Rounded Rectangle 9"/>
           <p:cNvSpPr/>
           <p:nvPr/>
         </p:nvSpPr>
         <p:spPr>
           <a:xfrm>
-            <a:off x="566928" y="2139696"/>
-            <a:ext cx="11057839" cy="648716"/>
+            <a:off x="6196431" y="1856232"/>
+            <a:ext cx="5428335" cy="2331720"/>
           </a:xfrm>
           <a:prstGeom prst="roundRect">
             <a:avLst>
-              <a:gd name="adj" fmla="val 22552"/>
+              <a:gd name="adj" fmla="val 6274"/>
+            </a:avLst>
+          </a:prstGeom>
+          <a:solidFill>
+            <a:srgbClr val="E6F5EE"/>
+          </a:solidFill>
+          <a:ln w="12700">
+            <a:solidFill>
+              <a:srgbClr val="0A8F5B"/>
+            </a:solidFill>
+          </a:ln>
+          <a:effectLst/>
+        </p:spPr>
+        <p:style>
+          <a:lnRef idx="1">
+            <a:schemeClr val="accent1"/>
+          </a:lnRef>
+          <a:fillRef idx="3">
+            <a:schemeClr val="accent1"/>
+          </a:fillRef>
+          <a:effectRef idx="2">
+            <a:schemeClr val="accent1"/>
+          </a:effectRef>
+          <a:fontRef idx="minor">
+            <a:schemeClr val="lt1"/>
+          </a:fontRef>
+        </p:style>
+        <p:txBody>
+          <a:bodyPr rtlCol="0" anchor="ctr"/>
+          <a:lstStyle/>
+          <a:p/>
+        </p:txBody>
+      </p:sp>
+      <p:sp>
+        <p:nvSpPr>
+          <p:cNvPr id="11" name="TextBox 10"/>
+          <p:cNvSpPr txBox="1"/>
+          <p:nvPr/>
+        </p:nvSpPr>
+        <p:spPr>
+          <a:xfrm>
+            <a:off x="6562191" y="2130552"/>
+            <a:ext cx="4696815" cy="274320"/>
+          </a:xfrm>
+          <a:prstGeom prst="rect">
+            <a:avLst/>
+          </a:prstGeom>
+          <a:noFill/>
+        </p:spPr>
+        <p:txBody>
+          <a:bodyPr wrap="square" lIns="0" rIns="0" tIns="0" bIns="0" anchor="t">
+            <a:spAutoFit/>
+          </a:bodyPr>
+          <a:lstStyle/>
+          <a:p>
+            <a:pPr algn="l">
+              <a:lnSpc>
+                <a:spcPct val="135000"/>
+              </a:lnSpc>
+            </a:pPr>
+            <a:r>
+              <a:rPr sz="1300" b="1" i="0" spc="156">
+                <a:solidFill>
+                  <a:srgbClr val="07734A"/>
+                </a:solidFill>
+                <a:latin typeface="Verdana"/>
+              </a:rPr>
+              <a:t>IL FAUT DIRE PLUTÔT</a:t>
+            </a:r>
+          </a:p>
+        </p:txBody>
+      </p:sp>
+      <p:sp>
+        <p:nvSpPr>
+          <p:cNvPr id="12" name="TextBox 11"/>
+          <p:cNvSpPr txBox="1"/>
+          <p:nvPr/>
+        </p:nvSpPr>
+        <p:spPr>
+          <a:xfrm>
+            <a:off x="6562191" y="2569464"/>
+            <a:ext cx="4696815" cy="1417320"/>
+          </a:xfrm>
+          <a:prstGeom prst="rect">
+            <a:avLst/>
+          </a:prstGeom>
+          <a:noFill/>
+        </p:spPr>
+        <p:txBody>
+          <a:bodyPr wrap="square" lIns="0" rIns="0" tIns="0" bIns="0" anchor="t">
+            <a:spAutoFit/>
+          </a:bodyPr>
+          <a:lstStyle/>
+          <a:p>
+            <a:pPr algn="l">
+              <a:lnSpc>
+                <a:spcPct val="130000"/>
+              </a:lnSpc>
+            </a:pPr>
+            <a:r>
+              <a:rPr sz="2500" b="1" i="0">
+                <a:solidFill>
+                  <a:srgbClr val="17181A"/>
+                </a:solidFill>
+                <a:latin typeface="Verdana"/>
+              </a:rPr>
+              <a:t>J'ai mal à la tête depuis deux semaines, j'appelle la clinique.</a:t>
+            </a:r>
+          </a:p>
+        </p:txBody>
+      </p:sp>
+      <p:sp>
+        <p:nvSpPr>
+          <p:cNvPr id="13" name="Rounded Rectangle 12"/>
+          <p:cNvSpPr/>
+          <p:nvPr/>
+        </p:nvSpPr>
+        <p:spPr>
+          <a:xfrm>
+            <a:off x="566928" y="4462272"/>
+            <a:ext cx="11057839" cy="1618487"/>
+          </a:xfrm>
+          <a:prstGeom prst="roundRect">
+            <a:avLst>
+              <a:gd name="adj" fmla="val 9039"/>
             </a:avLst>
           </a:prstGeom>
           <a:solidFill>
@@ -5385,58 +6433,14 @@
       </p:sp>
       <p:sp>
         <p:nvSpPr>
-          <p:cNvPr id="9" name="Rounded Rectangle 8"/>
-          <p:cNvSpPr/>
-          <p:nvPr/>
-        </p:nvSpPr>
-        <p:spPr>
-          <a:xfrm>
-            <a:off x="841247" y="2281174"/>
-            <a:ext cx="365760" cy="365760"/>
-          </a:xfrm>
-          <a:prstGeom prst="roundRect">
-            <a:avLst>
-              <a:gd name="adj" fmla="val 32500"/>
-            </a:avLst>
-          </a:prstGeom>
-          <a:solidFill>
-            <a:srgbClr val="E7F0F6"/>
-          </a:solidFill>
-          <a:ln>
-            <a:noFill/>
-          </a:ln>
-          <a:effectLst/>
-        </p:spPr>
-        <p:style>
-          <a:lnRef idx="1">
-            <a:schemeClr val="accent1"/>
-          </a:lnRef>
-          <a:fillRef idx="3">
-            <a:schemeClr val="accent1"/>
-          </a:fillRef>
-          <a:effectRef idx="2">
-            <a:schemeClr val="accent1"/>
-          </a:effectRef>
-          <a:fontRef idx="minor">
-            <a:schemeClr val="lt1"/>
-          </a:fontRef>
-        </p:style>
-        <p:txBody>
-          <a:bodyPr rtlCol="0" anchor="ctr"/>
-          <a:lstStyle/>
-          <a:p/>
-        </p:txBody>
-      </p:sp>
-      <p:sp>
-        <p:nvSpPr>
-          <p:cNvPr id="10" name="TextBox 9"/>
+          <p:cNvPr id="14" name="TextBox 13"/>
           <p:cNvSpPr txBox="1"/>
           <p:nvPr/>
         </p:nvSpPr>
         <p:spPr>
           <a:xfrm>
-            <a:off x="841247" y="2345182"/>
-            <a:ext cx="365760" cy="256032"/>
+            <a:off x="969264" y="4736592"/>
+            <a:ext cx="10234879" cy="1150620"/>
           </a:xfrm>
           <a:prstGeom prst="rect">
             <a:avLst/>
@@ -5449,562 +6453,19 @@
           </a:bodyPr>
           <a:lstStyle/>
           <a:p>
-            <a:pPr algn="ctr">
+            <a:pPr algn="l">
               <a:lnSpc>
-                <a:spcPct val="135000"/>
+                <a:spcPct val="145000"/>
               </a:lnSpc>
             </a:pPr>
             <a:r>
-              <a:rPr sz="1500" b="1" i="0">
-                <a:solidFill>
-                  <a:srgbClr val="1D6B8F"/>
-                </a:solidFill>
-                <a:latin typeface="Verdana"/>
-              </a:rPr>
-              <a:t>1</a:t>
-            </a:r>
-          </a:p>
-        </p:txBody>
-      </p:sp>
-      <p:sp>
-        <p:nvSpPr>
-          <p:cNvPr id="11" name="TextBox 10"/>
-          <p:cNvSpPr txBox="1"/>
-          <p:nvPr/>
-        </p:nvSpPr>
-        <p:spPr>
-          <a:xfrm>
-            <a:off x="1344168" y="2295144"/>
-            <a:ext cx="10097719" cy="374396"/>
-          </a:xfrm>
-          <a:prstGeom prst="rect">
-            <a:avLst/>
-          </a:prstGeom>
-          <a:noFill/>
-        </p:spPr>
-        <p:txBody>
-          <a:bodyPr wrap="square" lIns="0" rIns="0" tIns="0" bIns="0" anchor="t">
-            <a:spAutoFit/>
-          </a:bodyPr>
-          <a:lstStyle/>
-          <a:p>
-            <a:pPr algn="l">
-              <a:lnSpc>
-                <a:spcPct val="140000"/>
-              </a:lnSpc>
-            </a:pPr>
-            <a:r>
-              <a:rPr sz="1900" b="0" i="0">
-                <a:solidFill>
-                  <a:srgbClr val="3A3D40"/>
-                </a:solidFill>
-                <a:latin typeface="Verdana"/>
-              </a:rPr>
-              <a:t>Ma clinique</a:t>
-            </a:r>
-          </a:p>
-        </p:txBody>
-      </p:sp>
-      <p:sp>
-        <p:nvSpPr>
-          <p:cNvPr id="12" name="Rounded Rectangle 11"/>
-          <p:cNvSpPr/>
-          <p:nvPr/>
-        </p:nvSpPr>
-        <p:spPr>
-          <a:xfrm>
-            <a:off x="566928" y="2916428"/>
-            <a:ext cx="11057839" cy="648716"/>
-          </a:xfrm>
-          <a:prstGeom prst="roundRect">
-            <a:avLst>
-              <a:gd name="adj" fmla="val 22552"/>
-            </a:avLst>
-          </a:prstGeom>
-          <a:solidFill>
-            <a:srgbClr val="FFFFFF"/>
-          </a:solidFill>
-          <a:ln w="12700">
-            <a:solidFill>
-              <a:srgbClr val="EAEAE8"/>
-            </a:solidFill>
-          </a:ln>
-          <a:effectLst/>
-        </p:spPr>
-        <p:style>
-          <a:lnRef idx="1">
-            <a:schemeClr val="accent1"/>
-          </a:lnRef>
-          <a:fillRef idx="3">
-            <a:schemeClr val="accent1"/>
-          </a:fillRef>
-          <a:effectRef idx="2">
-            <a:schemeClr val="accent1"/>
-          </a:effectRef>
-          <a:fontRef idx="minor">
-            <a:schemeClr val="lt1"/>
-          </a:fontRef>
-        </p:style>
-        <p:txBody>
-          <a:bodyPr rtlCol="0" anchor="ctr"/>
-          <a:lstStyle/>
-          <a:p/>
-        </p:txBody>
-      </p:sp>
-      <p:sp>
-        <p:nvSpPr>
-          <p:cNvPr id="13" name="Rounded Rectangle 12"/>
-          <p:cNvSpPr/>
-          <p:nvPr/>
-        </p:nvSpPr>
-        <p:spPr>
-          <a:xfrm>
-            <a:off x="841247" y="3057905"/>
-            <a:ext cx="365760" cy="365760"/>
-          </a:xfrm>
-          <a:prstGeom prst="roundRect">
-            <a:avLst>
-              <a:gd name="adj" fmla="val 32500"/>
-            </a:avLst>
-          </a:prstGeom>
-          <a:solidFill>
-            <a:srgbClr val="E7F0F6"/>
-          </a:solidFill>
-          <a:ln>
-            <a:noFill/>
-          </a:ln>
-          <a:effectLst/>
-        </p:spPr>
-        <p:style>
-          <a:lnRef idx="1">
-            <a:schemeClr val="accent1"/>
-          </a:lnRef>
-          <a:fillRef idx="3">
-            <a:schemeClr val="accent1"/>
-          </a:fillRef>
-          <a:effectRef idx="2">
-            <a:schemeClr val="accent1"/>
-          </a:effectRef>
-          <a:fontRef idx="minor">
-            <a:schemeClr val="lt1"/>
-          </a:fontRef>
-        </p:style>
-        <p:txBody>
-          <a:bodyPr rtlCol="0" anchor="ctr"/>
-          <a:lstStyle/>
-          <a:p/>
-        </p:txBody>
-      </p:sp>
-      <p:sp>
-        <p:nvSpPr>
-          <p:cNvPr id="14" name="TextBox 13"/>
-          <p:cNvSpPr txBox="1"/>
-          <p:nvPr/>
-        </p:nvSpPr>
-        <p:spPr>
-          <a:xfrm>
-            <a:off x="841247" y="3121913"/>
-            <a:ext cx="365760" cy="256032"/>
-          </a:xfrm>
-          <a:prstGeom prst="rect">
-            <a:avLst/>
-          </a:prstGeom>
-          <a:noFill/>
-        </p:spPr>
-        <p:txBody>
-          <a:bodyPr wrap="square" lIns="0" rIns="0" tIns="0" bIns="0" anchor="t">
-            <a:spAutoFit/>
-          </a:bodyPr>
-          <a:lstStyle/>
-          <a:p>
-            <a:pPr algn="ctr">
-              <a:lnSpc>
-                <a:spcPct val="135000"/>
-              </a:lnSpc>
-            </a:pPr>
-            <a:r>
-              <a:rPr sz="1500" b="1" i="0">
-                <a:solidFill>
-                  <a:srgbClr val="1D6B8F"/>
-                </a:solidFill>
-                <a:latin typeface="Verdana"/>
-              </a:rPr>
-              <a:t>2</a:t>
-            </a:r>
-          </a:p>
-        </p:txBody>
-      </p:sp>
-      <p:sp>
-        <p:nvSpPr>
-          <p:cNvPr id="15" name="TextBox 14"/>
-          <p:cNvSpPr txBox="1"/>
-          <p:nvPr/>
-        </p:nvSpPr>
-        <p:spPr>
-          <a:xfrm>
-            <a:off x="1344168" y="3071876"/>
-            <a:ext cx="10097719" cy="374396"/>
-          </a:xfrm>
-          <a:prstGeom prst="rect">
-            <a:avLst/>
-          </a:prstGeom>
-          <a:noFill/>
-        </p:spPr>
-        <p:txBody>
-          <a:bodyPr wrap="square" lIns="0" rIns="0" tIns="0" bIns="0" anchor="t">
-            <a:spAutoFit/>
-          </a:bodyPr>
-          <a:lstStyle/>
-          <a:p>
-            <a:pPr algn="l">
-              <a:lnSpc>
-                <a:spcPct val="140000"/>
-              </a:lnSpc>
-            </a:pPr>
-            <a:r>
-              <a:rPr sz="1900" b="0" i="0">
-                <a:solidFill>
-                  <a:srgbClr val="3A3D40"/>
-                </a:solidFill>
-                <a:latin typeface="Verdana"/>
-              </a:rPr>
-              <a:t>Le sans rendez-vous le plus proche</a:t>
-            </a:r>
-          </a:p>
-        </p:txBody>
-      </p:sp>
-      <p:sp>
-        <p:nvSpPr>
-          <p:cNvPr id="16" name="Rounded Rectangle 15"/>
-          <p:cNvSpPr/>
-          <p:nvPr/>
-        </p:nvSpPr>
-        <p:spPr>
-          <a:xfrm>
-            <a:off x="566928" y="3693160"/>
-            <a:ext cx="11057839" cy="648716"/>
-          </a:xfrm>
-          <a:prstGeom prst="roundRect">
-            <a:avLst>
-              <a:gd name="adj" fmla="val 22552"/>
-            </a:avLst>
-          </a:prstGeom>
-          <a:solidFill>
-            <a:srgbClr val="FFFFFF"/>
-          </a:solidFill>
-          <a:ln w="12700">
-            <a:solidFill>
-              <a:srgbClr val="EAEAE8"/>
-            </a:solidFill>
-          </a:ln>
-          <a:effectLst/>
-        </p:spPr>
-        <p:style>
-          <a:lnRef idx="1">
-            <a:schemeClr val="accent1"/>
-          </a:lnRef>
-          <a:fillRef idx="3">
-            <a:schemeClr val="accent1"/>
-          </a:fillRef>
-          <a:effectRef idx="2">
-            <a:schemeClr val="accent1"/>
-          </a:effectRef>
-          <a:fontRef idx="minor">
-            <a:schemeClr val="lt1"/>
-          </a:fontRef>
-        </p:style>
-        <p:txBody>
-          <a:bodyPr rtlCol="0" anchor="ctr"/>
-          <a:lstStyle/>
-          <a:p/>
-        </p:txBody>
-      </p:sp>
-      <p:sp>
-        <p:nvSpPr>
-          <p:cNvPr id="17" name="Rounded Rectangle 16"/>
-          <p:cNvSpPr/>
-          <p:nvPr/>
-        </p:nvSpPr>
-        <p:spPr>
-          <a:xfrm>
-            <a:off x="841247" y="3834638"/>
-            <a:ext cx="365760" cy="365760"/>
-          </a:xfrm>
-          <a:prstGeom prst="roundRect">
-            <a:avLst>
-              <a:gd name="adj" fmla="val 32500"/>
-            </a:avLst>
-          </a:prstGeom>
-          <a:solidFill>
-            <a:srgbClr val="E7F0F6"/>
-          </a:solidFill>
-          <a:ln>
-            <a:noFill/>
-          </a:ln>
-          <a:effectLst/>
-        </p:spPr>
-        <p:style>
-          <a:lnRef idx="1">
-            <a:schemeClr val="accent1"/>
-          </a:lnRef>
-          <a:fillRef idx="3">
-            <a:schemeClr val="accent1"/>
-          </a:fillRef>
-          <a:effectRef idx="2">
-            <a:schemeClr val="accent1"/>
-          </a:effectRef>
-          <a:fontRef idx="minor">
-            <a:schemeClr val="lt1"/>
-          </a:fontRef>
-        </p:style>
-        <p:txBody>
-          <a:bodyPr rtlCol="0" anchor="ctr"/>
-          <a:lstStyle/>
-          <a:p/>
-        </p:txBody>
-      </p:sp>
-      <p:sp>
-        <p:nvSpPr>
-          <p:cNvPr id="18" name="TextBox 17"/>
-          <p:cNvSpPr txBox="1"/>
-          <p:nvPr/>
-        </p:nvSpPr>
-        <p:spPr>
-          <a:xfrm>
-            <a:off x="841247" y="3898646"/>
-            <a:ext cx="365760" cy="256032"/>
-          </a:xfrm>
-          <a:prstGeom prst="rect">
-            <a:avLst/>
-          </a:prstGeom>
-          <a:noFill/>
-        </p:spPr>
-        <p:txBody>
-          <a:bodyPr wrap="square" lIns="0" rIns="0" tIns="0" bIns="0" anchor="t">
-            <a:spAutoFit/>
-          </a:bodyPr>
-          <a:lstStyle/>
-          <a:p>
-            <a:pPr algn="ctr">
-              <a:lnSpc>
-                <a:spcPct val="135000"/>
-              </a:lnSpc>
-            </a:pPr>
-            <a:r>
-              <a:rPr sz="1500" b="1" i="0">
-                <a:solidFill>
-                  <a:srgbClr val="1D6B8F"/>
-                </a:solidFill>
-                <a:latin typeface="Verdana"/>
-              </a:rPr>
-              <a:t>3</a:t>
-            </a:r>
-          </a:p>
-        </p:txBody>
-      </p:sp>
-      <p:sp>
-        <p:nvSpPr>
-          <p:cNvPr id="19" name="TextBox 18"/>
-          <p:cNvSpPr txBox="1"/>
-          <p:nvPr/>
-        </p:nvSpPr>
-        <p:spPr>
-          <a:xfrm>
-            <a:off x="1344168" y="3848608"/>
-            <a:ext cx="10097719" cy="374396"/>
-          </a:xfrm>
-          <a:prstGeom prst="rect">
-            <a:avLst/>
-          </a:prstGeom>
-          <a:noFill/>
-        </p:spPr>
-        <p:txBody>
-          <a:bodyPr wrap="square" lIns="0" rIns="0" tIns="0" bIns="0" anchor="t">
-            <a:spAutoFit/>
-          </a:bodyPr>
-          <a:lstStyle/>
-          <a:p>
-            <a:pPr algn="l">
-              <a:lnSpc>
-                <a:spcPct val="140000"/>
-              </a:lnSpc>
-            </a:pPr>
-            <a:r>
-              <a:rPr sz="1900" b="0" i="0">
-                <a:solidFill>
-                  <a:srgbClr val="3A3D40"/>
-                </a:solidFill>
-                <a:latin typeface="Verdana"/>
-              </a:rPr>
-              <a:t>Ma pharmacie</a:t>
-            </a:r>
-          </a:p>
-        </p:txBody>
-      </p:sp>
-      <p:sp>
-        <p:nvSpPr>
-          <p:cNvPr id="20" name="Rounded Rectangle 19"/>
-          <p:cNvSpPr/>
-          <p:nvPr/>
-        </p:nvSpPr>
-        <p:spPr>
-          <a:xfrm>
-            <a:off x="566928" y="4469892"/>
-            <a:ext cx="11057839" cy="648716"/>
-          </a:xfrm>
-          <a:prstGeom prst="roundRect">
-            <a:avLst>
-              <a:gd name="adj" fmla="val 22552"/>
-            </a:avLst>
-          </a:prstGeom>
-          <a:solidFill>
-            <a:srgbClr val="FFFFFF"/>
-          </a:solidFill>
-          <a:ln w="12700">
-            <a:solidFill>
-              <a:srgbClr val="EAEAE8"/>
-            </a:solidFill>
-          </a:ln>
-          <a:effectLst/>
-        </p:spPr>
-        <p:style>
-          <a:lnRef idx="1">
-            <a:schemeClr val="accent1"/>
-          </a:lnRef>
-          <a:fillRef idx="3">
-            <a:schemeClr val="accent1"/>
-          </a:fillRef>
-          <a:effectRef idx="2">
-            <a:schemeClr val="accent1"/>
-          </a:effectRef>
-          <a:fontRef idx="minor">
-            <a:schemeClr val="lt1"/>
-          </a:fontRef>
-        </p:style>
-        <p:txBody>
-          <a:bodyPr rtlCol="0" anchor="ctr"/>
-          <a:lstStyle/>
-          <a:p/>
-        </p:txBody>
-      </p:sp>
-      <p:sp>
-        <p:nvSpPr>
-          <p:cNvPr id="21" name="Rounded Rectangle 20"/>
-          <p:cNvSpPr/>
-          <p:nvPr/>
-        </p:nvSpPr>
-        <p:spPr>
-          <a:xfrm>
-            <a:off x="841247" y="4611370"/>
-            <a:ext cx="365760" cy="365760"/>
-          </a:xfrm>
-          <a:prstGeom prst="roundRect">
-            <a:avLst>
-              <a:gd name="adj" fmla="val 32500"/>
-            </a:avLst>
-          </a:prstGeom>
-          <a:solidFill>
-            <a:srgbClr val="E7F0F6"/>
-          </a:solidFill>
-          <a:ln>
-            <a:noFill/>
-          </a:ln>
-          <a:effectLst/>
-        </p:spPr>
-        <p:style>
-          <a:lnRef idx="1">
-            <a:schemeClr val="accent1"/>
-          </a:lnRef>
-          <a:fillRef idx="3">
-            <a:schemeClr val="accent1"/>
-          </a:fillRef>
-          <a:effectRef idx="2">
-            <a:schemeClr val="accent1"/>
-          </a:effectRef>
-          <a:fontRef idx="minor">
-            <a:schemeClr val="lt1"/>
-          </a:fontRef>
-        </p:style>
-        <p:txBody>
-          <a:bodyPr rtlCol="0" anchor="ctr"/>
-          <a:lstStyle/>
-          <a:p/>
-        </p:txBody>
-      </p:sp>
-      <p:sp>
-        <p:nvSpPr>
-          <p:cNvPr id="22" name="TextBox 21"/>
-          <p:cNvSpPr txBox="1"/>
-          <p:nvPr/>
-        </p:nvSpPr>
-        <p:spPr>
-          <a:xfrm>
-            <a:off x="841247" y="4675378"/>
-            <a:ext cx="365760" cy="256032"/>
-          </a:xfrm>
-          <a:prstGeom prst="rect">
-            <a:avLst/>
-          </a:prstGeom>
-          <a:noFill/>
-        </p:spPr>
-        <p:txBody>
-          <a:bodyPr wrap="square" lIns="0" rIns="0" tIns="0" bIns="0" anchor="t">
-            <a:spAutoFit/>
-          </a:bodyPr>
-          <a:lstStyle/>
-          <a:p>
-            <a:pPr algn="ctr">
-              <a:lnSpc>
-                <a:spcPct val="135000"/>
-              </a:lnSpc>
-            </a:pPr>
-            <a:r>
-              <a:rPr sz="1500" b="1" i="0">
-                <a:solidFill>
-                  <a:srgbClr val="1D6B8F"/>
-                </a:solidFill>
-                <a:latin typeface="Verdana"/>
-              </a:rPr>
-              <a:t>4</a:t>
-            </a:r>
-          </a:p>
-        </p:txBody>
-      </p:sp>
-      <p:sp>
-        <p:nvSpPr>
-          <p:cNvPr id="23" name="TextBox 22"/>
-          <p:cNvSpPr txBox="1"/>
-          <p:nvPr/>
-        </p:nvSpPr>
-        <p:spPr>
-          <a:xfrm>
-            <a:off x="1344168" y="4625340"/>
-            <a:ext cx="10097719" cy="374396"/>
-          </a:xfrm>
-          <a:prstGeom prst="rect">
-            <a:avLst/>
-          </a:prstGeom>
-          <a:noFill/>
-        </p:spPr>
-        <p:txBody>
-          <a:bodyPr wrap="square" lIns="0" rIns="0" tIns="0" bIns="0" anchor="t">
-            <a:spAutoFit/>
-          </a:bodyPr>
-          <a:lstStyle/>
-          <a:p>
-            <a:pPr algn="l">
-              <a:lnSpc>
-                <a:spcPct val="140000"/>
-              </a:lnSpc>
-            </a:pPr>
-            <a:r>
-              <a:rPr sz="1900" b="0" i="0">
-                <a:solidFill>
-                  <a:srgbClr val="3A3D40"/>
-                </a:solidFill>
-                <a:latin typeface="Verdana"/>
-              </a:rPr>
-              <a:t>Info-Santé</a:t>
+              <a:rPr sz="2000" b="0" i="0">
+                <a:solidFill>
+                  <a:srgbClr val="4B4F52"/>
+                </a:solidFill>
+                <a:latin typeface="Verdana"/>
+              </a:rPr>
+              <a:t>L'urgence est faite pour ce qui met la vie en danger maintenant. Un problème qui dure depuis deux semaines y sera classé en dernier : l'attente peut dépasser huit heures, et le médecin de la clinique aurait votre dossier.</a:t>
             </a:r>
           </a:p>
         </p:txBody>
@@ -6149,6 +6610,933 @@
       </p:sp>
       <p:sp>
         <p:nvSpPr>
+          <p:cNvPr id="5" name="TextBox 4"/>
+          <p:cNvSpPr txBox="1"/>
+          <p:nvPr/>
+        </p:nvSpPr>
+        <p:spPr>
+          <a:xfrm>
+            <a:off x="566928" y="420624"/>
+            <a:ext cx="11057839" cy="237744"/>
+          </a:xfrm>
+          <a:prstGeom prst="rect">
+            <a:avLst/>
+          </a:prstGeom>
+          <a:noFill/>
+        </p:spPr>
+        <p:txBody>
+          <a:bodyPr wrap="square" lIns="0" rIns="0" tIns="0" bIns="0" anchor="t">
+            <a:spAutoFit/>
+          </a:bodyPr>
+          <a:lstStyle/>
+          <a:p>
+            <a:pPr algn="l">
+              <a:lnSpc>
+                <a:spcPct val="135000"/>
+              </a:lnSpc>
+            </a:pPr>
+            <a:r>
+              <a:rPr sz="1300" b="1" i="0" spc="156">
+                <a:solidFill>
+                  <a:srgbClr val="1D6B8F"/>
+                </a:solidFill>
+                <a:latin typeface="Verdana"/>
+              </a:rPr>
+              <a:t>PRATIQUE · 3 DE 3</a:t>
+            </a:r>
+          </a:p>
+        </p:txBody>
+      </p:sp>
+      <p:sp>
+        <p:nvSpPr>
+          <p:cNvPr id="6" name="TextBox 5"/>
+          <p:cNvSpPr txBox="1"/>
+          <p:nvPr/>
+        </p:nvSpPr>
+        <p:spPr>
+          <a:xfrm>
+            <a:off x="566928" y="749808"/>
+            <a:ext cx="11057839" cy="877824"/>
+          </a:xfrm>
+          <a:prstGeom prst="rect">
+            <a:avLst/>
+          </a:prstGeom>
+          <a:noFill/>
+        </p:spPr>
+        <p:txBody>
+          <a:bodyPr wrap="square" lIns="0" rIns="0" tIns="0" bIns="0" anchor="t">
+            <a:spAutoFit/>
+          </a:bodyPr>
+          <a:lstStyle/>
+          <a:p>
+            <a:pPr algn="l">
+              <a:lnSpc>
+                <a:spcPct val="115000"/>
+              </a:lnSpc>
+            </a:pPr>
+            <a:r>
+              <a:rPr sz="3400" b="1" i="0">
+                <a:solidFill>
+                  <a:srgbClr val="17181A"/>
+                </a:solidFill>
+                <a:latin typeface="Verdana"/>
+              </a:rPr>
+              <a:t>Votre carnet de numéros</a:t>
+            </a:r>
+          </a:p>
+        </p:txBody>
+      </p:sp>
+      <p:sp>
+        <p:nvSpPr>
+          <p:cNvPr id="7" name="TextBox 6"/>
+          <p:cNvSpPr txBox="1"/>
+          <p:nvPr/>
+        </p:nvSpPr>
+        <p:spPr>
+          <a:xfrm>
+            <a:off x="566928" y="1645920"/>
+            <a:ext cx="11057839" cy="329184"/>
+          </a:xfrm>
+          <a:prstGeom prst="rect">
+            <a:avLst/>
+          </a:prstGeom>
+          <a:noFill/>
+        </p:spPr>
+        <p:txBody>
+          <a:bodyPr wrap="square" lIns="0" rIns="0" tIns="0" bIns="0" anchor="t">
+            <a:spAutoFit/>
+          </a:bodyPr>
+          <a:lstStyle/>
+          <a:p>
+            <a:pPr algn="l">
+              <a:lnSpc>
+                <a:spcPct val="135000"/>
+              </a:lnSpc>
+            </a:pPr>
+            <a:r>
+              <a:rPr sz="1800" b="0" i="0">
+                <a:solidFill>
+                  <a:srgbClr val="6E7175"/>
+                </a:solidFill>
+                <a:latin typeface="Verdana"/>
+              </a:rPr>
+              <a:t>Écrivez les coordonnées de vos propres ressources.</a:t>
+            </a:r>
+          </a:p>
+        </p:txBody>
+      </p:sp>
+      <p:sp>
+        <p:nvSpPr>
+          <p:cNvPr id="8" name="Rounded Rectangle 7"/>
+          <p:cNvSpPr/>
+          <p:nvPr/>
+        </p:nvSpPr>
+        <p:spPr>
+          <a:xfrm>
+            <a:off x="566928" y="2139696"/>
+            <a:ext cx="11057839" cy="648716"/>
+          </a:xfrm>
+          <a:prstGeom prst="roundRect">
+            <a:avLst>
+              <a:gd name="adj" fmla="val 22552"/>
+            </a:avLst>
+          </a:prstGeom>
+          <a:solidFill>
+            <a:srgbClr val="FFFFFF"/>
+          </a:solidFill>
+          <a:ln w="12700">
+            <a:solidFill>
+              <a:srgbClr val="EAEAE8"/>
+            </a:solidFill>
+          </a:ln>
+          <a:effectLst/>
+        </p:spPr>
+        <p:style>
+          <a:lnRef idx="1">
+            <a:schemeClr val="accent1"/>
+          </a:lnRef>
+          <a:fillRef idx="3">
+            <a:schemeClr val="accent1"/>
+          </a:fillRef>
+          <a:effectRef idx="2">
+            <a:schemeClr val="accent1"/>
+          </a:effectRef>
+          <a:fontRef idx="minor">
+            <a:schemeClr val="lt1"/>
+          </a:fontRef>
+        </p:style>
+        <p:txBody>
+          <a:bodyPr rtlCol="0" anchor="ctr"/>
+          <a:lstStyle/>
+          <a:p/>
+        </p:txBody>
+      </p:sp>
+      <p:sp>
+        <p:nvSpPr>
+          <p:cNvPr id="9" name="Rounded Rectangle 8"/>
+          <p:cNvSpPr/>
+          <p:nvPr/>
+        </p:nvSpPr>
+        <p:spPr>
+          <a:xfrm>
+            <a:off x="841247" y="2281174"/>
+            <a:ext cx="365760" cy="365760"/>
+          </a:xfrm>
+          <a:prstGeom prst="roundRect">
+            <a:avLst>
+              <a:gd name="adj" fmla="val 32500"/>
+            </a:avLst>
+          </a:prstGeom>
+          <a:solidFill>
+            <a:srgbClr val="E7F0F6"/>
+          </a:solidFill>
+          <a:ln>
+            <a:noFill/>
+          </a:ln>
+          <a:effectLst/>
+        </p:spPr>
+        <p:style>
+          <a:lnRef idx="1">
+            <a:schemeClr val="accent1"/>
+          </a:lnRef>
+          <a:fillRef idx="3">
+            <a:schemeClr val="accent1"/>
+          </a:fillRef>
+          <a:effectRef idx="2">
+            <a:schemeClr val="accent1"/>
+          </a:effectRef>
+          <a:fontRef idx="minor">
+            <a:schemeClr val="lt1"/>
+          </a:fontRef>
+        </p:style>
+        <p:txBody>
+          <a:bodyPr rtlCol="0" anchor="ctr"/>
+          <a:lstStyle/>
+          <a:p/>
+        </p:txBody>
+      </p:sp>
+      <p:sp>
+        <p:nvSpPr>
+          <p:cNvPr id="10" name="TextBox 9"/>
+          <p:cNvSpPr txBox="1"/>
+          <p:nvPr/>
+        </p:nvSpPr>
+        <p:spPr>
+          <a:xfrm>
+            <a:off x="841247" y="2345182"/>
+            <a:ext cx="365760" cy="256032"/>
+          </a:xfrm>
+          <a:prstGeom prst="rect">
+            <a:avLst/>
+          </a:prstGeom>
+          <a:noFill/>
+        </p:spPr>
+        <p:txBody>
+          <a:bodyPr wrap="square" lIns="0" rIns="0" tIns="0" bIns="0" anchor="t">
+            <a:spAutoFit/>
+          </a:bodyPr>
+          <a:lstStyle/>
+          <a:p>
+            <a:pPr algn="ctr">
+              <a:lnSpc>
+                <a:spcPct val="135000"/>
+              </a:lnSpc>
+            </a:pPr>
+            <a:r>
+              <a:rPr sz="1500" b="1" i="0">
+                <a:solidFill>
+                  <a:srgbClr val="1D6B8F"/>
+                </a:solidFill>
+                <a:latin typeface="Verdana"/>
+              </a:rPr>
+              <a:t>1</a:t>
+            </a:r>
+          </a:p>
+        </p:txBody>
+      </p:sp>
+      <p:sp>
+        <p:nvSpPr>
+          <p:cNvPr id="11" name="TextBox 10"/>
+          <p:cNvSpPr txBox="1"/>
+          <p:nvPr/>
+        </p:nvSpPr>
+        <p:spPr>
+          <a:xfrm>
+            <a:off x="1344168" y="2295144"/>
+            <a:ext cx="10097719" cy="374396"/>
+          </a:xfrm>
+          <a:prstGeom prst="rect">
+            <a:avLst/>
+          </a:prstGeom>
+          <a:noFill/>
+        </p:spPr>
+        <p:txBody>
+          <a:bodyPr wrap="square" lIns="0" rIns="0" tIns="0" bIns="0" anchor="t">
+            <a:spAutoFit/>
+          </a:bodyPr>
+          <a:lstStyle/>
+          <a:p>
+            <a:pPr algn="l">
+              <a:lnSpc>
+                <a:spcPct val="140000"/>
+              </a:lnSpc>
+            </a:pPr>
+            <a:r>
+              <a:rPr sz="1900" b="0" i="0">
+                <a:solidFill>
+                  <a:srgbClr val="3A3D40"/>
+                </a:solidFill>
+                <a:latin typeface="Verdana"/>
+              </a:rPr>
+              <a:t>Ma clinique</a:t>
+            </a:r>
+          </a:p>
+        </p:txBody>
+      </p:sp>
+      <p:sp>
+        <p:nvSpPr>
+          <p:cNvPr id="12" name="Rounded Rectangle 11"/>
+          <p:cNvSpPr/>
+          <p:nvPr/>
+        </p:nvSpPr>
+        <p:spPr>
+          <a:xfrm>
+            <a:off x="566928" y="2916428"/>
+            <a:ext cx="11057839" cy="648716"/>
+          </a:xfrm>
+          <a:prstGeom prst="roundRect">
+            <a:avLst>
+              <a:gd name="adj" fmla="val 22552"/>
+            </a:avLst>
+          </a:prstGeom>
+          <a:solidFill>
+            <a:srgbClr val="FFFFFF"/>
+          </a:solidFill>
+          <a:ln w="12700">
+            <a:solidFill>
+              <a:srgbClr val="EAEAE8"/>
+            </a:solidFill>
+          </a:ln>
+          <a:effectLst/>
+        </p:spPr>
+        <p:style>
+          <a:lnRef idx="1">
+            <a:schemeClr val="accent1"/>
+          </a:lnRef>
+          <a:fillRef idx="3">
+            <a:schemeClr val="accent1"/>
+          </a:fillRef>
+          <a:effectRef idx="2">
+            <a:schemeClr val="accent1"/>
+          </a:effectRef>
+          <a:fontRef idx="minor">
+            <a:schemeClr val="lt1"/>
+          </a:fontRef>
+        </p:style>
+        <p:txBody>
+          <a:bodyPr rtlCol="0" anchor="ctr"/>
+          <a:lstStyle/>
+          <a:p/>
+        </p:txBody>
+      </p:sp>
+      <p:sp>
+        <p:nvSpPr>
+          <p:cNvPr id="13" name="Rounded Rectangle 12"/>
+          <p:cNvSpPr/>
+          <p:nvPr/>
+        </p:nvSpPr>
+        <p:spPr>
+          <a:xfrm>
+            <a:off x="841247" y="3057905"/>
+            <a:ext cx="365760" cy="365760"/>
+          </a:xfrm>
+          <a:prstGeom prst="roundRect">
+            <a:avLst>
+              <a:gd name="adj" fmla="val 32500"/>
+            </a:avLst>
+          </a:prstGeom>
+          <a:solidFill>
+            <a:srgbClr val="E7F0F6"/>
+          </a:solidFill>
+          <a:ln>
+            <a:noFill/>
+          </a:ln>
+          <a:effectLst/>
+        </p:spPr>
+        <p:style>
+          <a:lnRef idx="1">
+            <a:schemeClr val="accent1"/>
+          </a:lnRef>
+          <a:fillRef idx="3">
+            <a:schemeClr val="accent1"/>
+          </a:fillRef>
+          <a:effectRef idx="2">
+            <a:schemeClr val="accent1"/>
+          </a:effectRef>
+          <a:fontRef idx="minor">
+            <a:schemeClr val="lt1"/>
+          </a:fontRef>
+        </p:style>
+        <p:txBody>
+          <a:bodyPr rtlCol="0" anchor="ctr"/>
+          <a:lstStyle/>
+          <a:p/>
+        </p:txBody>
+      </p:sp>
+      <p:sp>
+        <p:nvSpPr>
+          <p:cNvPr id="14" name="TextBox 13"/>
+          <p:cNvSpPr txBox="1"/>
+          <p:nvPr/>
+        </p:nvSpPr>
+        <p:spPr>
+          <a:xfrm>
+            <a:off x="841247" y="3121913"/>
+            <a:ext cx="365760" cy="256032"/>
+          </a:xfrm>
+          <a:prstGeom prst="rect">
+            <a:avLst/>
+          </a:prstGeom>
+          <a:noFill/>
+        </p:spPr>
+        <p:txBody>
+          <a:bodyPr wrap="square" lIns="0" rIns="0" tIns="0" bIns="0" anchor="t">
+            <a:spAutoFit/>
+          </a:bodyPr>
+          <a:lstStyle/>
+          <a:p>
+            <a:pPr algn="ctr">
+              <a:lnSpc>
+                <a:spcPct val="135000"/>
+              </a:lnSpc>
+            </a:pPr>
+            <a:r>
+              <a:rPr sz="1500" b="1" i="0">
+                <a:solidFill>
+                  <a:srgbClr val="1D6B8F"/>
+                </a:solidFill>
+                <a:latin typeface="Verdana"/>
+              </a:rPr>
+              <a:t>2</a:t>
+            </a:r>
+          </a:p>
+        </p:txBody>
+      </p:sp>
+      <p:sp>
+        <p:nvSpPr>
+          <p:cNvPr id="15" name="TextBox 14"/>
+          <p:cNvSpPr txBox="1"/>
+          <p:nvPr/>
+        </p:nvSpPr>
+        <p:spPr>
+          <a:xfrm>
+            <a:off x="1344168" y="3071876"/>
+            <a:ext cx="10097719" cy="374396"/>
+          </a:xfrm>
+          <a:prstGeom prst="rect">
+            <a:avLst/>
+          </a:prstGeom>
+          <a:noFill/>
+        </p:spPr>
+        <p:txBody>
+          <a:bodyPr wrap="square" lIns="0" rIns="0" tIns="0" bIns="0" anchor="t">
+            <a:spAutoFit/>
+          </a:bodyPr>
+          <a:lstStyle/>
+          <a:p>
+            <a:pPr algn="l">
+              <a:lnSpc>
+                <a:spcPct val="140000"/>
+              </a:lnSpc>
+            </a:pPr>
+            <a:r>
+              <a:rPr sz="1900" b="0" i="0">
+                <a:solidFill>
+                  <a:srgbClr val="3A3D40"/>
+                </a:solidFill>
+                <a:latin typeface="Verdana"/>
+              </a:rPr>
+              <a:t>Le sans rendez-vous le plus proche</a:t>
+            </a:r>
+          </a:p>
+        </p:txBody>
+      </p:sp>
+      <p:sp>
+        <p:nvSpPr>
+          <p:cNvPr id="16" name="Rounded Rectangle 15"/>
+          <p:cNvSpPr/>
+          <p:nvPr/>
+        </p:nvSpPr>
+        <p:spPr>
+          <a:xfrm>
+            <a:off x="566928" y="3693160"/>
+            <a:ext cx="11057839" cy="648716"/>
+          </a:xfrm>
+          <a:prstGeom prst="roundRect">
+            <a:avLst>
+              <a:gd name="adj" fmla="val 22552"/>
+            </a:avLst>
+          </a:prstGeom>
+          <a:solidFill>
+            <a:srgbClr val="FFFFFF"/>
+          </a:solidFill>
+          <a:ln w="12700">
+            <a:solidFill>
+              <a:srgbClr val="EAEAE8"/>
+            </a:solidFill>
+          </a:ln>
+          <a:effectLst/>
+        </p:spPr>
+        <p:style>
+          <a:lnRef idx="1">
+            <a:schemeClr val="accent1"/>
+          </a:lnRef>
+          <a:fillRef idx="3">
+            <a:schemeClr val="accent1"/>
+          </a:fillRef>
+          <a:effectRef idx="2">
+            <a:schemeClr val="accent1"/>
+          </a:effectRef>
+          <a:fontRef idx="minor">
+            <a:schemeClr val="lt1"/>
+          </a:fontRef>
+        </p:style>
+        <p:txBody>
+          <a:bodyPr rtlCol="0" anchor="ctr"/>
+          <a:lstStyle/>
+          <a:p/>
+        </p:txBody>
+      </p:sp>
+      <p:sp>
+        <p:nvSpPr>
+          <p:cNvPr id="17" name="Rounded Rectangle 16"/>
+          <p:cNvSpPr/>
+          <p:nvPr/>
+        </p:nvSpPr>
+        <p:spPr>
+          <a:xfrm>
+            <a:off x="841247" y="3834638"/>
+            <a:ext cx="365760" cy="365760"/>
+          </a:xfrm>
+          <a:prstGeom prst="roundRect">
+            <a:avLst>
+              <a:gd name="adj" fmla="val 32500"/>
+            </a:avLst>
+          </a:prstGeom>
+          <a:solidFill>
+            <a:srgbClr val="E7F0F6"/>
+          </a:solidFill>
+          <a:ln>
+            <a:noFill/>
+          </a:ln>
+          <a:effectLst/>
+        </p:spPr>
+        <p:style>
+          <a:lnRef idx="1">
+            <a:schemeClr val="accent1"/>
+          </a:lnRef>
+          <a:fillRef idx="3">
+            <a:schemeClr val="accent1"/>
+          </a:fillRef>
+          <a:effectRef idx="2">
+            <a:schemeClr val="accent1"/>
+          </a:effectRef>
+          <a:fontRef idx="minor">
+            <a:schemeClr val="lt1"/>
+          </a:fontRef>
+        </p:style>
+        <p:txBody>
+          <a:bodyPr rtlCol="0" anchor="ctr"/>
+          <a:lstStyle/>
+          <a:p/>
+        </p:txBody>
+      </p:sp>
+      <p:sp>
+        <p:nvSpPr>
+          <p:cNvPr id="18" name="TextBox 17"/>
+          <p:cNvSpPr txBox="1"/>
+          <p:nvPr/>
+        </p:nvSpPr>
+        <p:spPr>
+          <a:xfrm>
+            <a:off x="841247" y="3898646"/>
+            <a:ext cx="365760" cy="256032"/>
+          </a:xfrm>
+          <a:prstGeom prst="rect">
+            <a:avLst/>
+          </a:prstGeom>
+          <a:noFill/>
+        </p:spPr>
+        <p:txBody>
+          <a:bodyPr wrap="square" lIns="0" rIns="0" tIns="0" bIns="0" anchor="t">
+            <a:spAutoFit/>
+          </a:bodyPr>
+          <a:lstStyle/>
+          <a:p>
+            <a:pPr algn="ctr">
+              <a:lnSpc>
+                <a:spcPct val="135000"/>
+              </a:lnSpc>
+            </a:pPr>
+            <a:r>
+              <a:rPr sz="1500" b="1" i="0">
+                <a:solidFill>
+                  <a:srgbClr val="1D6B8F"/>
+                </a:solidFill>
+                <a:latin typeface="Verdana"/>
+              </a:rPr>
+              <a:t>3</a:t>
+            </a:r>
+          </a:p>
+        </p:txBody>
+      </p:sp>
+      <p:sp>
+        <p:nvSpPr>
+          <p:cNvPr id="19" name="TextBox 18"/>
+          <p:cNvSpPr txBox="1"/>
+          <p:nvPr/>
+        </p:nvSpPr>
+        <p:spPr>
+          <a:xfrm>
+            <a:off x="1344168" y="3848608"/>
+            <a:ext cx="10097719" cy="374396"/>
+          </a:xfrm>
+          <a:prstGeom prst="rect">
+            <a:avLst/>
+          </a:prstGeom>
+          <a:noFill/>
+        </p:spPr>
+        <p:txBody>
+          <a:bodyPr wrap="square" lIns="0" rIns="0" tIns="0" bIns="0" anchor="t">
+            <a:spAutoFit/>
+          </a:bodyPr>
+          <a:lstStyle/>
+          <a:p>
+            <a:pPr algn="l">
+              <a:lnSpc>
+                <a:spcPct val="140000"/>
+              </a:lnSpc>
+            </a:pPr>
+            <a:r>
+              <a:rPr sz="1900" b="0" i="0">
+                <a:solidFill>
+                  <a:srgbClr val="3A3D40"/>
+                </a:solidFill>
+                <a:latin typeface="Verdana"/>
+              </a:rPr>
+              <a:t>Ma pharmacie</a:t>
+            </a:r>
+          </a:p>
+        </p:txBody>
+      </p:sp>
+      <p:sp>
+        <p:nvSpPr>
+          <p:cNvPr id="20" name="Rounded Rectangle 19"/>
+          <p:cNvSpPr/>
+          <p:nvPr/>
+        </p:nvSpPr>
+        <p:spPr>
+          <a:xfrm>
+            <a:off x="566928" y="4469892"/>
+            <a:ext cx="11057839" cy="648716"/>
+          </a:xfrm>
+          <a:prstGeom prst="roundRect">
+            <a:avLst>
+              <a:gd name="adj" fmla="val 22552"/>
+            </a:avLst>
+          </a:prstGeom>
+          <a:solidFill>
+            <a:srgbClr val="FFFFFF"/>
+          </a:solidFill>
+          <a:ln w="12700">
+            <a:solidFill>
+              <a:srgbClr val="EAEAE8"/>
+            </a:solidFill>
+          </a:ln>
+          <a:effectLst/>
+        </p:spPr>
+        <p:style>
+          <a:lnRef idx="1">
+            <a:schemeClr val="accent1"/>
+          </a:lnRef>
+          <a:fillRef idx="3">
+            <a:schemeClr val="accent1"/>
+          </a:fillRef>
+          <a:effectRef idx="2">
+            <a:schemeClr val="accent1"/>
+          </a:effectRef>
+          <a:fontRef idx="minor">
+            <a:schemeClr val="lt1"/>
+          </a:fontRef>
+        </p:style>
+        <p:txBody>
+          <a:bodyPr rtlCol="0" anchor="ctr"/>
+          <a:lstStyle/>
+          <a:p/>
+        </p:txBody>
+      </p:sp>
+      <p:sp>
+        <p:nvSpPr>
+          <p:cNvPr id="21" name="Rounded Rectangle 20"/>
+          <p:cNvSpPr/>
+          <p:nvPr/>
+        </p:nvSpPr>
+        <p:spPr>
+          <a:xfrm>
+            <a:off x="841247" y="4611370"/>
+            <a:ext cx="365760" cy="365760"/>
+          </a:xfrm>
+          <a:prstGeom prst="roundRect">
+            <a:avLst>
+              <a:gd name="adj" fmla="val 32500"/>
+            </a:avLst>
+          </a:prstGeom>
+          <a:solidFill>
+            <a:srgbClr val="E7F0F6"/>
+          </a:solidFill>
+          <a:ln>
+            <a:noFill/>
+          </a:ln>
+          <a:effectLst/>
+        </p:spPr>
+        <p:style>
+          <a:lnRef idx="1">
+            <a:schemeClr val="accent1"/>
+          </a:lnRef>
+          <a:fillRef idx="3">
+            <a:schemeClr val="accent1"/>
+          </a:fillRef>
+          <a:effectRef idx="2">
+            <a:schemeClr val="accent1"/>
+          </a:effectRef>
+          <a:fontRef idx="minor">
+            <a:schemeClr val="lt1"/>
+          </a:fontRef>
+        </p:style>
+        <p:txBody>
+          <a:bodyPr rtlCol="0" anchor="ctr"/>
+          <a:lstStyle/>
+          <a:p/>
+        </p:txBody>
+      </p:sp>
+      <p:sp>
+        <p:nvSpPr>
+          <p:cNvPr id="22" name="TextBox 21"/>
+          <p:cNvSpPr txBox="1"/>
+          <p:nvPr/>
+        </p:nvSpPr>
+        <p:spPr>
+          <a:xfrm>
+            <a:off x="841247" y="4675378"/>
+            <a:ext cx="365760" cy="256032"/>
+          </a:xfrm>
+          <a:prstGeom prst="rect">
+            <a:avLst/>
+          </a:prstGeom>
+          <a:noFill/>
+        </p:spPr>
+        <p:txBody>
+          <a:bodyPr wrap="square" lIns="0" rIns="0" tIns="0" bIns="0" anchor="t">
+            <a:spAutoFit/>
+          </a:bodyPr>
+          <a:lstStyle/>
+          <a:p>
+            <a:pPr algn="ctr">
+              <a:lnSpc>
+                <a:spcPct val="135000"/>
+              </a:lnSpc>
+            </a:pPr>
+            <a:r>
+              <a:rPr sz="1500" b="1" i="0">
+                <a:solidFill>
+                  <a:srgbClr val="1D6B8F"/>
+                </a:solidFill>
+                <a:latin typeface="Verdana"/>
+              </a:rPr>
+              <a:t>4</a:t>
+            </a:r>
+          </a:p>
+        </p:txBody>
+      </p:sp>
+      <p:sp>
+        <p:nvSpPr>
+          <p:cNvPr id="23" name="TextBox 22"/>
+          <p:cNvSpPr txBox="1"/>
+          <p:nvPr/>
+        </p:nvSpPr>
+        <p:spPr>
+          <a:xfrm>
+            <a:off x="1344168" y="4625340"/>
+            <a:ext cx="10097719" cy="374396"/>
+          </a:xfrm>
+          <a:prstGeom prst="rect">
+            <a:avLst/>
+          </a:prstGeom>
+          <a:noFill/>
+        </p:spPr>
+        <p:txBody>
+          <a:bodyPr wrap="square" lIns="0" rIns="0" tIns="0" bIns="0" anchor="t">
+            <a:spAutoFit/>
+          </a:bodyPr>
+          <a:lstStyle/>
+          <a:p>
+            <a:pPr algn="l">
+              <a:lnSpc>
+                <a:spcPct val="140000"/>
+              </a:lnSpc>
+            </a:pPr>
+            <a:r>
+              <a:rPr sz="1900" b="0" i="0">
+                <a:solidFill>
+                  <a:srgbClr val="3A3D40"/>
+                </a:solidFill>
+                <a:latin typeface="Verdana"/>
+              </a:rPr>
+              <a:t>Info-Santé</a:t>
+            </a:r>
+          </a:p>
+        </p:txBody>
+      </p:sp>
+    </p:spTree>
+  </p:cSld>
+  <p:clrMapOvr>
+    <a:masterClrMapping/>
+  </p:clrMapOvr>
+</p:sld>
+</file>
+
+<file path=ppt/slides/slide13.xml><?xml version="1.0" encoding="utf-8"?>
+<p:sld xmlns:a="http://schemas.openxmlformats.org/drawingml/2006/main" xmlns:p="http://schemas.openxmlformats.org/presentationml/2006/main" xmlns:r="http://schemas.openxmlformats.org/officeDocument/2006/relationships">
+  <p:cSld>
+    <p:spTree>
+      <p:nvGrpSpPr>
+        <p:cNvPr id="1" name=""/>
+        <p:cNvGrpSpPr/>
+        <p:nvPr/>
+      </p:nvGrpSpPr>
+      <p:grpSpPr/>
+      <p:sp>
+        <p:nvSpPr>
+          <p:cNvPr id="2" name="Rectangle 1"/>
+          <p:cNvSpPr/>
+          <p:nvPr/>
+        </p:nvSpPr>
+        <p:spPr>
+          <a:xfrm>
+            <a:off x="0" y="0"/>
+            <a:ext cx="12191695" cy="6858000"/>
+          </a:xfrm>
+          <a:prstGeom prst="rect">
+            <a:avLst/>
+          </a:prstGeom>
+          <a:solidFill>
+            <a:srgbClr val="F7F7F5"/>
+          </a:solidFill>
+          <a:ln>
+            <a:noFill/>
+          </a:ln>
+          <a:effectLst/>
+        </p:spPr>
+        <p:style>
+          <a:lnRef idx="1">
+            <a:schemeClr val="accent1"/>
+          </a:lnRef>
+          <a:fillRef idx="3">
+            <a:schemeClr val="accent1"/>
+          </a:fillRef>
+          <a:effectRef idx="2">
+            <a:schemeClr val="accent1"/>
+          </a:effectRef>
+          <a:fontRef idx="minor">
+            <a:schemeClr val="lt1"/>
+          </a:fontRef>
+        </p:style>
+        <p:txBody>
+          <a:bodyPr rtlCol="0" anchor="ctr"/>
+          <a:lstStyle/>
+          <a:p/>
+        </p:txBody>
+      </p:sp>
+      <p:sp>
+        <p:nvSpPr>
+          <p:cNvPr id="3" name="TextBox 2"/>
+          <p:cNvSpPr txBox="1"/>
+          <p:nvPr/>
+        </p:nvSpPr>
+        <p:spPr>
+          <a:xfrm>
+            <a:off x="566928" y="6355080"/>
+            <a:ext cx="6400800" cy="219456"/>
+          </a:xfrm>
+          <a:prstGeom prst="rect">
+            <a:avLst/>
+          </a:prstGeom>
+          <a:noFill/>
+        </p:spPr>
+        <p:txBody>
+          <a:bodyPr wrap="square" lIns="0" rIns="0" tIns="0" bIns="0" anchor="t">
+            <a:spAutoFit/>
+          </a:bodyPr>
+          <a:lstStyle/>
+          <a:p>
+            <a:pPr algn="l">
+              <a:lnSpc>
+                <a:spcPct val="135000"/>
+              </a:lnSpc>
+            </a:pPr>
+            <a:r>
+              <a:rPr sz="1200" b="0" i="0">
+                <a:solidFill>
+                  <a:srgbClr val="6E7175"/>
+                </a:solidFill>
+                <a:latin typeface="Verdana"/>
+              </a:rPr>
+              <a:t>A2 · Prendre rendez-vous et aller à la pharmacie</a:t>
+            </a:r>
+          </a:p>
+        </p:txBody>
+      </p:sp>
+      <p:sp>
+        <p:nvSpPr>
+          <p:cNvPr id="4" name="TextBox 3"/>
+          <p:cNvSpPr txBox="1"/>
+          <p:nvPr/>
+        </p:nvSpPr>
+        <p:spPr>
+          <a:xfrm>
+            <a:off x="10710367" y="6355080"/>
+            <a:ext cx="914400" cy="219456"/>
+          </a:xfrm>
+          <a:prstGeom prst="rect">
+            <a:avLst/>
+          </a:prstGeom>
+          <a:noFill/>
+        </p:spPr>
+        <p:txBody>
+          <a:bodyPr wrap="square" lIns="0" rIns="0" tIns="0" bIns="0" anchor="t">
+            <a:spAutoFit/>
+          </a:bodyPr>
+          <a:lstStyle/>
+          <a:p>
+            <a:pPr algn="r">
+              <a:lnSpc>
+                <a:spcPct val="135000"/>
+              </a:lnSpc>
+            </a:pPr>
+            <a:r>
+              <a:rPr sz="1200" b="0" i="0">
+                <a:solidFill>
+                  <a:srgbClr val="6E7175"/>
+                </a:solidFill>
+                <a:latin typeface="Verdana"/>
+              </a:rPr>
+              <a:t>13</a:t>
+            </a:r>
+          </a:p>
+        </p:txBody>
+      </p:sp>
+      <p:sp>
+        <p:nvSpPr>
           <p:cNvPr id="5" name="Rectangle 4"/>
           <p:cNvSpPr/>
           <p:nvPr/>
@@ -11821,7 +13209,7 @@
                 </a:solidFill>
                 <a:latin typeface="Verdana"/>
               </a:rPr>
-              <a:t>PRATIQUE · 2 DE 3</a:t>
+              <a:t>DANS L'ACTIVITÉ INTERACTIVE</a:t>
             </a:r>
           </a:p>
         </p:txBody>
@@ -11860,7 +13248,7 @@
                 </a:solidFill>
                 <a:latin typeface="Verdana"/>
               </a:rPr>
-              <a:t>Et dans ces cas-là ?</a:t>
+              <a:t>Où s'adresser ?</a:t>
             </a:r>
           </a:p>
         </p:txBody>
@@ -11899,7 +13287,7 @@
                 </a:solidFill>
                 <a:latin typeface="Verdana"/>
               </a:rPr>
-              <a:t>Six situations qui ne sont pas dans le module. Discutez à deux.</a:t>
+              <a:t>L'écran que les élèves vont ouvrir. Les réponses sont encore dans le banc, à droite.</a:t>
             </a:r>
           </a:p>
         </p:txBody>
@@ -11912,12 +13300,12 @@
         </p:nvSpPr>
         <p:spPr>
           <a:xfrm>
-            <a:off x="566928" y="2139696"/>
-            <a:ext cx="11057839" cy="559816"/>
+            <a:off x="2101436" y="2084831"/>
+            <a:ext cx="7988822" cy="4087368"/>
           </a:xfrm>
           <a:prstGeom prst="roundRect">
             <a:avLst>
-              <a:gd name="adj" fmla="val 26134"/>
+              <a:gd name="adj" fmla="val 2237"/>
             </a:avLst>
           </a:prstGeom>
           <a:solidFill>
@@ -11925,7 +13313,7 @@
           </a:solidFill>
           <a:ln w="12700">
             <a:solidFill>
-              <a:srgbClr val="EAEAE8"/>
+              <a:srgbClr val="D6D6D2"/>
             </a:solidFill>
           </a:ln>
           <a:effectLst/>
@@ -11950,968 +13338,30 @@
           <a:p/>
         </p:txBody>
       </p:sp>
-      <p:sp>
-        <p:nvSpPr>
-          <p:cNvPr id="9" name="Rounded Rectangle 8"/>
-          <p:cNvSpPr/>
-          <p:nvPr/>
-        </p:nvSpPr>
-        <p:spPr>
-          <a:xfrm>
-            <a:off x="841247" y="2236724"/>
-            <a:ext cx="365760" cy="365760"/>
-          </a:xfrm>
-          <a:prstGeom prst="roundRect">
-            <a:avLst>
-              <a:gd name="adj" fmla="val 32500"/>
-            </a:avLst>
-          </a:prstGeom>
-          <a:solidFill>
-            <a:srgbClr val="E7F0F6"/>
-          </a:solidFill>
-          <a:ln>
-            <a:noFill/>
-          </a:ln>
-          <a:effectLst/>
-        </p:spPr>
-        <p:style>
-          <a:lnRef idx="1">
-            <a:schemeClr val="accent1"/>
-          </a:lnRef>
-          <a:fillRef idx="3">
-            <a:schemeClr val="accent1"/>
-          </a:fillRef>
-          <a:effectRef idx="2">
-            <a:schemeClr val="accent1"/>
-          </a:effectRef>
-          <a:fontRef idx="minor">
-            <a:schemeClr val="lt1"/>
-          </a:fontRef>
-        </p:style>
-        <p:txBody>
-          <a:bodyPr rtlCol="0" anchor="ctr"/>
-          <a:lstStyle/>
-          <a:p/>
-        </p:txBody>
-      </p:sp>
-      <p:sp>
-        <p:nvSpPr>
-          <p:cNvPr id="10" name="TextBox 9"/>
-          <p:cNvSpPr txBox="1"/>
-          <p:nvPr/>
-        </p:nvSpPr>
-        <p:spPr>
-          <a:xfrm>
-            <a:off x="841247" y="2300732"/>
-            <a:ext cx="365760" cy="256032"/>
-          </a:xfrm>
-          <a:prstGeom prst="rect">
-            <a:avLst/>
-          </a:prstGeom>
-          <a:noFill/>
-        </p:spPr>
-        <p:txBody>
-          <a:bodyPr wrap="square" lIns="0" rIns="0" tIns="0" bIns="0" anchor="t">
-            <a:spAutoFit/>
-          </a:bodyPr>
-          <a:lstStyle/>
-          <a:p>
-            <a:pPr algn="ctr">
-              <a:lnSpc>
-                <a:spcPct val="135000"/>
-              </a:lnSpc>
-            </a:pPr>
-            <a:r>
-              <a:rPr sz="1500" b="1" i="0">
-                <a:solidFill>
-                  <a:srgbClr val="1D6B8F"/>
-                </a:solidFill>
-                <a:latin typeface="Verdana"/>
-              </a:rPr>
-              <a:t>1</a:t>
-            </a:r>
-          </a:p>
-        </p:txBody>
-      </p:sp>
-      <p:sp>
-        <p:nvSpPr>
-          <p:cNvPr id="11" name="TextBox 10"/>
-          <p:cNvSpPr txBox="1"/>
-          <p:nvPr/>
-        </p:nvSpPr>
-        <p:spPr>
-          <a:xfrm>
-            <a:off x="1344168" y="2295144"/>
-            <a:ext cx="10097719" cy="285496"/>
-          </a:xfrm>
-          <a:prstGeom prst="rect">
-            <a:avLst/>
-          </a:prstGeom>
-          <a:noFill/>
-        </p:spPr>
-        <p:txBody>
-          <a:bodyPr wrap="square" lIns="0" rIns="0" tIns="0" bIns="0" anchor="t">
-            <a:spAutoFit/>
-          </a:bodyPr>
-          <a:lstStyle/>
-          <a:p>
-            <a:pPr algn="l">
-              <a:lnSpc>
-                <a:spcPct val="140000"/>
-              </a:lnSpc>
-            </a:pPr>
-            <a:r>
-              <a:rPr sz="1400" b="0" i="0">
-                <a:solidFill>
-                  <a:srgbClr val="3A3D40"/>
-                </a:solidFill>
-                <a:latin typeface="Verdana"/>
-              </a:rPr>
-              <a:t>Vous toussez depuis trois jours, sans fièvre.</a:t>
-            </a:r>
-          </a:p>
-        </p:txBody>
-      </p:sp>
-      <p:sp>
-        <p:nvSpPr>
-          <p:cNvPr id="12" name="Rounded Rectangle 11"/>
-          <p:cNvSpPr/>
-          <p:nvPr/>
-        </p:nvSpPr>
-        <p:spPr>
-          <a:xfrm>
-            <a:off x="566928" y="2827528"/>
-            <a:ext cx="11057839" cy="559816"/>
-          </a:xfrm>
-          <a:prstGeom prst="roundRect">
-            <a:avLst>
-              <a:gd name="adj" fmla="val 26134"/>
-            </a:avLst>
-          </a:prstGeom>
-          <a:solidFill>
-            <a:srgbClr val="FFFFFF"/>
-          </a:solidFill>
-          <a:ln w="12700">
-            <a:solidFill>
-              <a:srgbClr val="EAEAE8"/>
-            </a:solidFill>
-          </a:ln>
-          <a:effectLst/>
-        </p:spPr>
-        <p:style>
-          <a:lnRef idx="1">
-            <a:schemeClr val="accent1"/>
-          </a:lnRef>
-          <a:fillRef idx="3">
-            <a:schemeClr val="accent1"/>
-          </a:fillRef>
-          <a:effectRef idx="2">
-            <a:schemeClr val="accent1"/>
-          </a:effectRef>
-          <a:fontRef idx="minor">
-            <a:schemeClr val="lt1"/>
-          </a:fontRef>
-        </p:style>
-        <p:txBody>
-          <a:bodyPr rtlCol="0" anchor="ctr"/>
-          <a:lstStyle/>
-          <a:p/>
-        </p:txBody>
-      </p:sp>
-      <p:sp>
-        <p:nvSpPr>
-          <p:cNvPr id="13" name="Rounded Rectangle 12"/>
-          <p:cNvSpPr/>
-          <p:nvPr/>
-        </p:nvSpPr>
-        <p:spPr>
-          <a:xfrm>
-            <a:off x="841247" y="2924556"/>
-            <a:ext cx="365760" cy="365760"/>
-          </a:xfrm>
-          <a:prstGeom prst="roundRect">
-            <a:avLst>
-              <a:gd name="adj" fmla="val 32500"/>
-            </a:avLst>
-          </a:prstGeom>
-          <a:solidFill>
-            <a:srgbClr val="E7F0F6"/>
-          </a:solidFill>
-          <a:ln>
-            <a:noFill/>
-          </a:ln>
-          <a:effectLst/>
-        </p:spPr>
-        <p:style>
-          <a:lnRef idx="1">
-            <a:schemeClr val="accent1"/>
-          </a:lnRef>
-          <a:fillRef idx="3">
-            <a:schemeClr val="accent1"/>
-          </a:fillRef>
-          <a:effectRef idx="2">
-            <a:schemeClr val="accent1"/>
-          </a:effectRef>
-          <a:fontRef idx="minor">
-            <a:schemeClr val="lt1"/>
-          </a:fontRef>
-        </p:style>
-        <p:txBody>
-          <a:bodyPr rtlCol="0" anchor="ctr"/>
-          <a:lstStyle/>
-          <a:p/>
-        </p:txBody>
-      </p:sp>
-      <p:sp>
-        <p:nvSpPr>
-          <p:cNvPr id="14" name="TextBox 13"/>
-          <p:cNvSpPr txBox="1"/>
-          <p:nvPr/>
-        </p:nvSpPr>
-        <p:spPr>
-          <a:xfrm>
-            <a:off x="841247" y="2988564"/>
-            <a:ext cx="365760" cy="256032"/>
-          </a:xfrm>
-          <a:prstGeom prst="rect">
-            <a:avLst/>
-          </a:prstGeom>
-          <a:noFill/>
-        </p:spPr>
-        <p:txBody>
-          <a:bodyPr wrap="square" lIns="0" rIns="0" tIns="0" bIns="0" anchor="t">
-            <a:spAutoFit/>
-          </a:bodyPr>
-          <a:lstStyle/>
-          <a:p>
-            <a:pPr algn="ctr">
-              <a:lnSpc>
-                <a:spcPct val="135000"/>
-              </a:lnSpc>
-            </a:pPr>
-            <a:r>
-              <a:rPr sz="1500" b="1" i="0">
-                <a:solidFill>
-                  <a:srgbClr val="1D6B8F"/>
-                </a:solidFill>
-                <a:latin typeface="Verdana"/>
-              </a:rPr>
-              <a:t>2</a:t>
-            </a:r>
-          </a:p>
-        </p:txBody>
-      </p:sp>
-      <p:sp>
-        <p:nvSpPr>
-          <p:cNvPr id="15" name="TextBox 14"/>
-          <p:cNvSpPr txBox="1"/>
-          <p:nvPr/>
-        </p:nvSpPr>
-        <p:spPr>
-          <a:xfrm>
-            <a:off x="1344168" y="2982975"/>
-            <a:ext cx="10097719" cy="285496"/>
-          </a:xfrm>
-          <a:prstGeom prst="rect">
-            <a:avLst/>
-          </a:prstGeom>
-          <a:noFill/>
-        </p:spPr>
-        <p:txBody>
-          <a:bodyPr wrap="square" lIns="0" rIns="0" tIns="0" bIns="0" anchor="t">
-            <a:spAutoFit/>
-          </a:bodyPr>
-          <a:lstStyle/>
-          <a:p>
-            <a:pPr algn="l">
-              <a:lnSpc>
-                <a:spcPct val="140000"/>
-              </a:lnSpc>
-            </a:pPr>
-            <a:r>
-              <a:rPr sz="1400" b="0" i="0">
-                <a:solidFill>
-                  <a:srgbClr val="3A3D40"/>
-                </a:solidFill>
-                <a:latin typeface="Verdana"/>
-              </a:rPr>
-              <a:t>Votre voisin ne répond plus et respire mal.</a:t>
-            </a:r>
-          </a:p>
-        </p:txBody>
-      </p:sp>
-      <p:sp>
-        <p:nvSpPr>
-          <p:cNvPr id="16" name="Rounded Rectangle 15"/>
-          <p:cNvSpPr/>
-          <p:nvPr/>
-        </p:nvSpPr>
-        <p:spPr>
-          <a:xfrm>
-            <a:off x="566928" y="3515359"/>
-            <a:ext cx="11057839" cy="559816"/>
-          </a:xfrm>
-          <a:prstGeom prst="roundRect">
-            <a:avLst>
-              <a:gd name="adj" fmla="val 26134"/>
-            </a:avLst>
-          </a:prstGeom>
-          <a:solidFill>
-            <a:srgbClr val="FFFFFF"/>
-          </a:solidFill>
-          <a:ln w="12700">
-            <a:solidFill>
-              <a:srgbClr val="EAEAE8"/>
-            </a:solidFill>
-          </a:ln>
-          <a:effectLst/>
-        </p:spPr>
-        <p:style>
-          <a:lnRef idx="1">
-            <a:schemeClr val="accent1"/>
-          </a:lnRef>
-          <a:fillRef idx="3">
-            <a:schemeClr val="accent1"/>
-          </a:fillRef>
-          <a:effectRef idx="2">
-            <a:schemeClr val="accent1"/>
-          </a:effectRef>
-          <a:fontRef idx="minor">
-            <a:schemeClr val="lt1"/>
-          </a:fontRef>
-        </p:style>
-        <p:txBody>
-          <a:bodyPr rtlCol="0" anchor="ctr"/>
-          <a:lstStyle/>
-          <a:p/>
-        </p:txBody>
-      </p:sp>
-      <p:sp>
-        <p:nvSpPr>
-          <p:cNvPr id="17" name="Rounded Rectangle 16"/>
-          <p:cNvSpPr/>
-          <p:nvPr/>
-        </p:nvSpPr>
-        <p:spPr>
-          <a:xfrm>
-            <a:off x="841247" y="3612388"/>
-            <a:ext cx="365760" cy="365760"/>
-          </a:xfrm>
-          <a:prstGeom prst="roundRect">
-            <a:avLst>
-              <a:gd name="adj" fmla="val 32500"/>
-            </a:avLst>
-          </a:prstGeom>
-          <a:solidFill>
-            <a:srgbClr val="E7F0F6"/>
-          </a:solidFill>
-          <a:ln>
-            <a:noFill/>
-          </a:ln>
-          <a:effectLst/>
-        </p:spPr>
-        <p:style>
-          <a:lnRef idx="1">
-            <a:schemeClr val="accent1"/>
-          </a:lnRef>
-          <a:fillRef idx="3">
-            <a:schemeClr val="accent1"/>
-          </a:fillRef>
-          <a:effectRef idx="2">
-            <a:schemeClr val="accent1"/>
-          </a:effectRef>
-          <a:fontRef idx="minor">
-            <a:schemeClr val="lt1"/>
-          </a:fontRef>
-        </p:style>
-        <p:txBody>
-          <a:bodyPr rtlCol="0" anchor="ctr"/>
-          <a:lstStyle/>
-          <a:p/>
-        </p:txBody>
-      </p:sp>
-      <p:sp>
-        <p:nvSpPr>
-          <p:cNvPr id="18" name="TextBox 17"/>
-          <p:cNvSpPr txBox="1"/>
-          <p:nvPr/>
-        </p:nvSpPr>
-        <p:spPr>
-          <a:xfrm>
-            <a:off x="841247" y="3676395"/>
-            <a:ext cx="365760" cy="256032"/>
-          </a:xfrm>
-          <a:prstGeom prst="rect">
-            <a:avLst/>
-          </a:prstGeom>
-          <a:noFill/>
-        </p:spPr>
-        <p:txBody>
-          <a:bodyPr wrap="square" lIns="0" rIns="0" tIns="0" bIns="0" anchor="t">
-            <a:spAutoFit/>
-          </a:bodyPr>
-          <a:lstStyle/>
-          <a:p>
-            <a:pPr algn="ctr">
-              <a:lnSpc>
-                <a:spcPct val="135000"/>
-              </a:lnSpc>
-            </a:pPr>
-            <a:r>
-              <a:rPr sz="1500" b="1" i="0">
-                <a:solidFill>
-                  <a:srgbClr val="1D6B8F"/>
-                </a:solidFill>
-                <a:latin typeface="Verdana"/>
-              </a:rPr>
-              <a:t>3</a:t>
-            </a:r>
-          </a:p>
-        </p:txBody>
-      </p:sp>
-      <p:sp>
-        <p:nvSpPr>
-          <p:cNvPr id="19" name="TextBox 18"/>
-          <p:cNvSpPr txBox="1"/>
-          <p:nvPr/>
-        </p:nvSpPr>
-        <p:spPr>
-          <a:xfrm>
-            <a:off x="1344168" y="3670807"/>
-            <a:ext cx="10097719" cy="285496"/>
-          </a:xfrm>
-          <a:prstGeom prst="rect">
-            <a:avLst/>
-          </a:prstGeom>
-          <a:noFill/>
-        </p:spPr>
-        <p:txBody>
-          <a:bodyPr wrap="square" lIns="0" rIns="0" tIns="0" bIns="0" anchor="t">
-            <a:spAutoFit/>
-          </a:bodyPr>
-          <a:lstStyle/>
-          <a:p>
-            <a:pPr algn="l">
-              <a:lnSpc>
-                <a:spcPct val="140000"/>
-              </a:lnSpc>
-            </a:pPr>
-            <a:r>
-              <a:rPr sz="1400" b="0" i="0">
-                <a:solidFill>
-                  <a:srgbClr val="3A3D40"/>
-                </a:solidFill>
-                <a:latin typeface="Verdana"/>
-              </a:rPr>
-              <a:t>Vous avez besoin d'un billet du médecin pour votre employeur.</a:t>
-            </a:r>
-          </a:p>
-        </p:txBody>
-      </p:sp>
-      <p:sp>
-        <p:nvSpPr>
-          <p:cNvPr id="20" name="Rounded Rectangle 19"/>
-          <p:cNvSpPr/>
-          <p:nvPr/>
-        </p:nvSpPr>
-        <p:spPr>
-          <a:xfrm>
-            <a:off x="566928" y="4203192"/>
-            <a:ext cx="11057839" cy="808735"/>
-          </a:xfrm>
-          <a:prstGeom prst="roundRect">
-            <a:avLst>
-              <a:gd name="adj" fmla="val 18090"/>
-            </a:avLst>
-          </a:prstGeom>
-          <a:solidFill>
-            <a:srgbClr val="FFFFFF"/>
-          </a:solidFill>
-          <a:ln w="12700">
-            <a:solidFill>
-              <a:srgbClr val="EAEAE8"/>
-            </a:solidFill>
-          </a:ln>
-          <a:effectLst/>
-        </p:spPr>
-        <p:style>
-          <a:lnRef idx="1">
-            <a:schemeClr val="accent1"/>
-          </a:lnRef>
-          <a:fillRef idx="3">
-            <a:schemeClr val="accent1"/>
-          </a:fillRef>
-          <a:effectRef idx="2">
-            <a:schemeClr val="accent1"/>
-          </a:effectRef>
-          <a:fontRef idx="minor">
-            <a:schemeClr val="lt1"/>
-          </a:fontRef>
-        </p:style>
-        <p:txBody>
-          <a:bodyPr rtlCol="0" anchor="ctr"/>
-          <a:lstStyle/>
-          <a:p/>
-        </p:txBody>
-      </p:sp>
-      <p:sp>
-        <p:nvSpPr>
-          <p:cNvPr id="21" name="Rounded Rectangle 20"/>
-          <p:cNvSpPr/>
-          <p:nvPr/>
-        </p:nvSpPr>
-        <p:spPr>
-          <a:xfrm>
-            <a:off x="841247" y="4424680"/>
-            <a:ext cx="365760" cy="365760"/>
-          </a:xfrm>
-          <a:prstGeom prst="roundRect">
-            <a:avLst>
-              <a:gd name="adj" fmla="val 32500"/>
-            </a:avLst>
-          </a:prstGeom>
-          <a:solidFill>
-            <a:srgbClr val="E7F0F6"/>
-          </a:solidFill>
-          <a:ln>
-            <a:noFill/>
-          </a:ln>
-          <a:effectLst/>
-        </p:spPr>
-        <p:style>
-          <a:lnRef idx="1">
-            <a:schemeClr val="accent1"/>
-          </a:lnRef>
-          <a:fillRef idx="3">
-            <a:schemeClr val="accent1"/>
-          </a:fillRef>
-          <a:effectRef idx="2">
-            <a:schemeClr val="accent1"/>
-          </a:effectRef>
-          <a:fontRef idx="minor">
-            <a:schemeClr val="lt1"/>
-          </a:fontRef>
-        </p:style>
-        <p:txBody>
-          <a:bodyPr rtlCol="0" anchor="ctr"/>
-          <a:lstStyle/>
-          <a:p/>
-        </p:txBody>
-      </p:sp>
-      <p:sp>
-        <p:nvSpPr>
-          <p:cNvPr id="22" name="TextBox 21"/>
-          <p:cNvSpPr txBox="1"/>
-          <p:nvPr/>
-        </p:nvSpPr>
-        <p:spPr>
-          <a:xfrm>
-            <a:off x="841247" y="4488688"/>
-            <a:ext cx="365760" cy="256032"/>
-          </a:xfrm>
-          <a:prstGeom prst="rect">
-            <a:avLst/>
-          </a:prstGeom>
-          <a:noFill/>
-        </p:spPr>
-        <p:txBody>
-          <a:bodyPr wrap="square" lIns="0" rIns="0" tIns="0" bIns="0" anchor="t">
-            <a:spAutoFit/>
-          </a:bodyPr>
-          <a:lstStyle/>
-          <a:p>
-            <a:pPr algn="ctr">
-              <a:lnSpc>
-                <a:spcPct val="135000"/>
-              </a:lnSpc>
-            </a:pPr>
-            <a:r>
-              <a:rPr sz="1500" b="1" i="0">
-                <a:solidFill>
-                  <a:srgbClr val="1D6B8F"/>
-                </a:solidFill>
-                <a:latin typeface="Verdana"/>
-              </a:rPr>
-              <a:t>4</a:t>
-            </a:r>
-          </a:p>
-        </p:txBody>
-      </p:sp>
-      <p:sp>
-        <p:nvSpPr>
-          <p:cNvPr id="23" name="TextBox 22"/>
-          <p:cNvSpPr txBox="1"/>
-          <p:nvPr/>
-        </p:nvSpPr>
-        <p:spPr>
-          <a:xfrm>
-            <a:off x="1344168" y="4358640"/>
-            <a:ext cx="10097719" cy="534415"/>
-          </a:xfrm>
-          <a:prstGeom prst="rect">
-            <a:avLst/>
-          </a:prstGeom>
-          <a:noFill/>
-        </p:spPr>
-        <p:txBody>
-          <a:bodyPr wrap="square" lIns="0" rIns="0" tIns="0" bIns="0" anchor="t">
-            <a:spAutoFit/>
-          </a:bodyPr>
-          <a:lstStyle/>
-          <a:p>
-            <a:pPr algn="l">
-              <a:lnSpc>
-                <a:spcPct val="140000"/>
-              </a:lnSpc>
-            </a:pPr>
-            <a:r>
-              <a:rPr sz="1400" b="0" i="0">
-                <a:solidFill>
-                  <a:srgbClr val="3A3D40"/>
-                </a:solidFill>
-                <a:latin typeface="Verdana"/>
-              </a:rPr>
-              <a:t>Vous ne savez pas si votre médicament se prend avec du lait.</a:t>
-            </a:r>
-          </a:p>
-        </p:txBody>
-      </p:sp>
-      <p:sp>
-        <p:nvSpPr>
-          <p:cNvPr id="24" name="Rounded Rectangle 23"/>
-          <p:cNvSpPr/>
-          <p:nvPr/>
-        </p:nvSpPr>
-        <p:spPr>
-          <a:xfrm>
-            <a:off x="566928" y="5139943"/>
-            <a:ext cx="11057839" cy="559816"/>
-          </a:xfrm>
-          <a:prstGeom prst="roundRect">
-            <a:avLst>
-              <a:gd name="adj" fmla="val 26134"/>
-            </a:avLst>
-          </a:prstGeom>
-          <a:solidFill>
-            <a:srgbClr val="FFFFFF"/>
-          </a:solidFill>
-          <a:ln w="12700">
-            <a:solidFill>
-              <a:srgbClr val="EAEAE8"/>
-            </a:solidFill>
-          </a:ln>
-          <a:effectLst/>
-        </p:spPr>
-        <p:style>
-          <a:lnRef idx="1">
-            <a:schemeClr val="accent1"/>
-          </a:lnRef>
-          <a:fillRef idx="3">
-            <a:schemeClr val="accent1"/>
-          </a:fillRef>
-          <a:effectRef idx="2">
-            <a:schemeClr val="accent1"/>
-          </a:effectRef>
-          <a:fontRef idx="minor">
-            <a:schemeClr val="lt1"/>
-          </a:fontRef>
-        </p:style>
-        <p:txBody>
-          <a:bodyPr rtlCol="0" anchor="ctr"/>
-          <a:lstStyle/>
-          <a:p/>
-        </p:txBody>
-      </p:sp>
-      <p:sp>
-        <p:nvSpPr>
-          <p:cNvPr id="25" name="Rounded Rectangle 24"/>
-          <p:cNvSpPr/>
-          <p:nvPr/>
-        </p:nvSpPr>
-        <p:spPr>
-          <a:xfrm>
-            <a:off x="841247" y="5236971"/>
-            <a:ext cx="365760" cy="365760"/>
-          </a:xfrm>
-          <a:prstGeom prst="roundRect">
-            <a:avLst>
-              <a:gd name="adj" fmla="val 32500"/>
-            </a:avLst>
-          </a:prstGeom>
-          <a:solidFill>
-            <a:srgbClr val="E7F0F6"/>
-          </a:solidFill>
-          <a:ln>
-            <a:noFill/>
-          </a:ln>
-          <a:effectLst/>
-        </p:spPr>
-        <p:style>
-          <a:lnRef idx="1">
-            <a:schemeClr val="accent1"/>
-          </a:lnRef>
-          <a:fillRef idx="3">
-            <a:schemeClr val="accent1"/>
-          </a:fillRef>
-          <a:effectRef idx="2">
-            <a:schemeClr val="accent1"/>
-          </a:effectRef>
-          <a:fontRef idx="minor">
-            <a:schemeClr val="lt1"/>
-          </a:fontRef>
-        </p:style>
-        <p:txBody>
-          <a:bodyPr rtlCol="0" anchor="ctr"/>
-          <a:lstStyle/>
-          <a:p/>
-        </p:txBody>
-      </p:sp>
-      <p:sp>
-        <p:nvSpPr>
-          <p:cNvPr id="26" name="TextBox 25"/>
-          <p:cNvSpPr txBox="1"/>
-          <p:nvPr/>
-        </p:nvSpPr>
-        <p:spPr>
-          <a:xfrm>
-            <a:off x="841247" y="5300979"/>
-            <a:ext cx="365760" cy="256032"/>
-          </a:xfrm>
-          <a:prstGeom prst="rect">
-            <a:avLst/>
-          </a:prstGeom>
-          <a:noFill/>
-        </p:spPr>
-        <p:txBody>
-          <a:bodyPr wrap="square" lIns="0" rIns="0" tIns="0" bIns="0" anchor="t">
-            <a:spAutoFit/>
-          </a:bodyPr>
-          <a:lstStyle/>
-          <a:p>
-            <a:pPr algn="ctr">
-              <a:lnSpc>
-                <a:spcPct val="135000"/>
-              </a:lnSpc>
-            </a:pPr>
-            <a:r>
-              <a:rPr sz="1500" b="1" i="0">
-                <a:solidFill>
-                  <a:srgbClr val="1D6B8F"/>
-                </a:solidFill>
-                <a:latin typeface="Verdana"/>
-              </a:rPr>
-              <a:t>5</a:t>
-            </a:r>
-          </a:p>
-        </p:txBody>
-      </p:sp>
-      <p:sp>
-        <p:nvSpPr>
-          <p:cNvPr id="27" name="TextBox 26"/>
-          <p:cNvSpPr txBox="1"/>
-          <p:nvPr/>
-        </p:nvSpPr>
-        <p:spPr>
-          <a:xfrm>
-            <a:off x="1344168" y="5295391"/>
-            <a:ext cx="10097719" cy="285496"/>
-          </a:xfrm>
-          <a:prstGeom prst="rect">
-            <a:avLst/>
-          </a:prstGeom>
-          <a:noFill/>
-        </p:spPr>
-        <p:txBody>
-          <a:bodyPr wrap="square" lIns="0" rIns="0" tIns="0" bIns="0" anchor="t">
-            <a:spAutoFit/>
-          </a:bodyPr>
-          <a:lstStyle/>
-          <a:p>
-            <a:pPr algn="l">
-              <a:lnSpc>
-                <a:spcPct val="140000"/>
-              </a:lnSpc>
-            </a:pPr>
-            <a:r>
-              <a:rPr sz="1400" b="0" i="0">
-                <a:solidFill>
-                  <a:srgbClr val="3A3D40"/>
-                </a:solidFill>
-                <a:latin typeface="Verdana"/>
-              </a:rPr>
-              <a:t>Vous vous êtes coupé le doigt, ça saigne mais peu.</a:t>
-            </a:r>
-          </a:p>
-        </p:txBody>
-      </p:sp>
-      <p:sp>
-        <p:nvSpPr>
-          <p:cNvPr id="28" name="Rounded Rectangle 27"/>
-          <p:cNvSpPr/>
-          <p:nvPr/>
-        </p:nvSpPr>
-        <p:spPr>
-          <a:xfrm>
-            <a:off x="566928" y="5827776"/>
-            <a:ext cx="11057839" cy="559816"/>
-          </a:xfrm>
-          <a:prstGeom prst="roundRect">
-            <a:avLst>
-              <a:gd name="adj" fmla="val 26134"/>
-            </a:avLst>
-          </a:prstGeom>
-          <a:solidFill>
-            <a:srgbClr val="FFFFFF"/>
-          </a:solidFill>
-          <a:ln w="12700">
-            <a:solidFill>
-              <a:srgbClr val="EAEAE8"/>
-            </a:solidFill>
-          </a:ln>
-          <a:effectLst/>
-        </p:spPr>
-        <p:style>
-          <a:lnRef idx="1">
-            <a:schemeClr val="accent1"/>
-          </a:lnRef>
-          <a:fillRef idx="3">
-            <a:schemeClr val="accent1"/>
-          </a:fillRef>
-          <a:effectRef idx="2">
-            <a:schemeClr val="accent1"/>
-          </a:effectRef>
-          <a:fontRef idx="minor">
-            <a:schemeClr val="lt1"/>
-          </a:fontRef>
-        </p:style>
-        <p:txBody>
-          <a:bodyPr rtlCol="0" anchor="ctr"/>
-          <a:lstStyle/>
-          <a:p/>
-        </p:txBody>
-      </p:sp>
-      <p:sp>
-        <p:nvSpPr>
-          <p:cNvPr id="29" name="Rounded Rectangle 28"/>
-          <p:cNvSpPr/>
-          <p:nvPr/>
-        </p:nvSpPr>
-        <p:spPr>
-          <a:xfrm>
-            <a:off x="841247" y="5924803"/>
-            <a:ext cx="365760" cy="365760"/>
-          </a:xfrm>
-          <a:prstGeom prst="roundRect">
-            <a:avLst>
-              <a:gd name="adj" fmla="val 32500"/>
-            </a:avLst>
-          </a:prstGeom>
-          <a:solidFill>
-            <a:srgbClr val="E7F0F6"/>
-          </a:solidFill>
-          <a:ln>
-            <a:noFill/>
-          </a:ln>
-          <a:effectLst/>
-        </p:spPr>
-        <p:style>
-          <a:lnRef idx="1">
-            <a:schemeClr val="accent1"/>
-          </a:lnRef>
-          <a:fillRef idx="3">
-            <a:schemeClr val="accent1"/>
-          </a:fillRef>
-          <a:effectRef idx="2">
-            <a:schemeClr val="accent1"/>
-          </a:effectRef>
-          <a:fontRef idx="minor">
-            <a:schemeClr val="lt1"/>
-          </a:fontRef>
-        </p:style>
-        <p:txBody>
-          <a:bodyPr rtlCol="0" anchor="ctr"/>
-          <a:lstStyle/>
-          <a:p/>
-        </p:txBody>
-      </p:sp>
-      <p:sp>
-        <p:nvSpPr>
-          <p:cNvPr id="30" name="TextBox 29"/>
-          <p:cNvSpPr txBox="1"/>
-          <p:nvPr/>
-        </p:nvSpPr>
-        <p:spPr>
-          <a:xfrm>
-            <a:off x="841247" y="5988812"/>
-            <a:ext cx="365760" cy="256032"/>
-          </a:xfrm>
-          <a:prstGeom prst="rect">
-            <a:avLst/>
-          </a:prstGeom>
-          <a:noFill/>
-        </p:spPr>
-        <p:txBody>
-          <a:bodyPr wrap="square" lIns="0" rIns="0" tIns="0" bIns="0" anchor="t">
-            <a:spAutoFit/>
-          </a:bodyPr>
-          <a:lstStyle/>
-          <a:p>
-            <a:pPr algn="ctr">
-              <a:lnSpc>
-                <a:spcPct val="135000"/>
-              </a:lnSpc>
-            </a:pPr>
-            <a:r>
-              <a:rPr sz="1500" b="1" i="0">
-                <a:solidFill>
-                  <a:srgbClr val="1D6B8F"/>
-                </a:solidFill>
-                <a:latin typeface="Verdana"/>
-              </a:rPr>
-              <a:t>6</a:t>
-            </a:r>
-          </a:p>
-        </p:txBody>
-      </p:sp>
-      <p:sp>
-        <p:nvSpPr>
-          <p:cNvPr id="31" name="TextBox 30"/>
-          <p:cNvSpPr txBox="1"/>
-          <p:nvPr/>
-        </p:nvSpPr>
-        <p:spPr>
-          <a:xfrm>
-            <a:off x="1344168" y="5983224"/>
-            <a:ext cx="10097719" cy="285496"/>
-          </a:xfrm>
-          <a:prstGeom prst="rect">
-            <a:avLst/>
-          </a:prstGeom>
-          <a:noFill/>
-        </p:spPr>
-        <p:txBody>
-          <a:bodyPr wrap="square" lIns="0" rIns="0" tIns="0" bIns="0" anchor="t">
-            <a:spAutoFit/>
-          </a:bodyPr>
-          <a:lstStyle/>
-          <a:p>
-            <a:pPr algn="l">
-              <a:lnSpc>
-                <a:spcPct val="140000"/>
-              </a:lnSpc>
-            </a:pPr>
-            <a:r>
-              <a:rPr sz="1400" b="0" i="0">
-                <a:solidFill>
-                  <a:srgbClr val="3A3D40"/>
-                </a:solidFill>
-                <a:latin typeface="Verdana"/>
-              </a:rPr>
-              <a:t>Votre fille a la même fièvre depuis quatre jours.</a:t>
-            </a:r>
-          </a:p>
-        </p:txBody>
-      </p:sp>
+      <p:pic>
+        <p:nvPicPr>
+          <p:cNvPr id="9" name="Picture 8" descr="pr1.png"/>
+          <p:cNvPicPr>
+            <a:picLocks noChangeAspect="1"/>
+          </p:cNvPicPr>
+          <p:nvPr/>
+        </p:nvPicPr>
+        <p:blipFill>
+          <a:blip r:embed="rId2"/>
+          <a:stretch>
+            <a:fillRect/>
+          </a:stretch>
+        </p:blipFill>
+        <p:spPr>
+          <a:xfrm>
+            <a:off x="2119724" y="2103120"/>
+            <a:ext cx="7952246" cy="4050792"/>
+          </a:xfrm>
+          <a:prstGeom prst="rect">
+            <a:avLst/>
+          </a:prstGeom>
+        </p:spPr>
+      </p:pic>
     </p:spTree>
   </p:cSld>
   <p:clrMapOvr>
@@ -13084,7 +13534,7 @@
                 </a:solidFill>
                 <a:latin typeface="Verdana"/>
               </a:rPr>
-              <a:t>CORRECTION</a:t>
+              <a:t>PRATIQUE · 2 DE 3</a:t>
             </a:r>
           </a:p>
         </p:txBody>
@@ -13162,7 +13612,7 @@
                 </a:solidFill>
                 <a:latin typeface="Verdana"/>
               </a:rPr>
-              <a:t>Correction — on lit la réponse, on ne commente pas l'erreur.</a:t>
+              <a:t>Six situations qui ne sont pas dans le module. Discutez à deux.</a:t>
             </a:r>
           </a:p>
         </p:txBody>
@@ -13184,7 +13634,7 @@
             </a:avLst>
           </a:prstGeom>
           <a:solidFill>
-            <a:srgbClr val="E6F5EE"/>
+            <a:srgbClr val="FFFFFF"/>
           </a:solidFill>
           <a:ln w="12700">
             <a:solidFill>
@@ -13330,16 +13780,7 @@
                 </a:solidFill>
                 <a:latin typeface="Verdana"/>
               </a:rPr>
-              <a:t>Vous toussez depuis trois jours, sans fièvre.   </a:t>
-            </a:r>
-            <a:r>
-              <a:rPr sz="1400" b="1" i="0">
-                <a:solidFill>
-                  <a:srgbClr val="07734A"/>
-                </a:solidFill>
-                <a:latin typeface="Verdana"/>
-              </a:rPr>
-              <a:t>» la pharmacie d'abord, ou 811 si ça inquiète</a:t>
+              <a:t>Vous toussez depuis trois jours, sans fièvre.</a:t>
             </a:r>
           </a:p>
         </p:txBody>
@@ -13361,7 +13802,7 @@
             </a:avLst>
           </a:prstGeom>
           <a:solidFill>
-            <a:srgbClr val="E6F5EE"/>
+            <a:srgbClr val="FFFFFF"/>
           </a:solidFill>
           <a:ln w="12700">
             <a:solidFill>
@@ -13507,16 +13948,7 @@
                 </a:solidFill>
                 <a:latin typeface="Verdana"/>
               </a:rPr>
-              <a:t>Votre voisin ne répond plus et respire mal.   </a:t>
-            </a:r>
-            <a:r>
-              <a:rPr sz="1400" b="1" i="0">
-                <a:solidFill>
-                  <a:srgbClr val="07734A"/>
-                </a:solidFill>
-                <a:latin typeface="Verdana"/>
-              </a:rPr>
-              <a:t>» le 911, tout de suite</a:t>
+              <a:t>Votre voisin ne répond plus et respire mal.</a:t>
             </a:r>
           </a:p>
         </p:txBody>
@@ -13538,7 +13970,7 @@
             </a:avLst>
           </a:prstGeom>
           <a:solidFill>
-            <a:srgbClr val="E6F5EE"/>
+            <a:srgbClr val="FFFFFF"/>
           </a:solidFill>
           <a:ln w="12700">
             <a:solidFill>
@@ -13684,16 +14116,7 @@
                 </a:solidFill>
                 <a:latin typeface="Verdana"/>
               </a:rPr>
-              <a:t>Vous avez besoin d'un billet du médecin pour votre employeur.   </a:t>
-            </a:r>
-            <a:r>
-              <a:rPr sz="1400" b="1" i="0">
-                <a:solidFill>
-                  <a:srgbClr val="07734A"/>
-                </a:solidFill>
-                <a:latin typeface="Verdana"/>
-              </a:rPr>
-              <a:t>» la clinique, avec rendez-vous</a:t>
+              <a:t>Vous avez besoin d'un billet du médecin pour votre employeur.</a:t>
             </a:r>
           </a:p>
         </p:txBody>
@@ -13715,7 +14138,7 @@
             </a:avLst>
           </a:prstGeom>
           <a:solidFill>
-            <a:srgbClr val="E6F5EE"/>
+            <a:srgbClr val="FFFFFF"/>
           </a:solidFill>
           <a:ln w="12700">
             <a:solidFill>
@@ -13861,16 +14284,7 @@
                 </a:solidFill>
                 <a:latin typeface="Verdana"/>
               </a:rPr>
-              <a:t>Vous ne savez pas si votre médicament se prend avec du lait.   </a:t>
-            </a:r>
-            <a:r>
-              <a:rPr sz="1400" b="1" i="0">
-                <a:solidFill>
-                  <a:srgbClr val="07734A"/>
-                </a:solidFill>
-                <a:latin typeface="Verdana"/>
-              </a:rPr>
-              <a:t>» la pharmacie — c'est gratuit et sans rendez-vous</a:t>
+              <a:t>Vous ne savez pas si votre médicament se prend avec du lait.</a:t>
             </a:r>
           </a:p>
         </p:txBody>
@@ -13892,7 +14306,7 @@
             </a:avLst>
           </a:prstGeom>
           <a:solidFill>
-            <a:srgbClr val="E6F5EE"/>
+            <a:srgbClr val="FFFFFF"/>
           </a:solidFill>
           <a:ln w="12700">
             <a:solidFill>
@@ -14038,16 +14452,7 @@
                 </a:solidFill>
                 <a:latin typeface="Verdana"/>
               </a:rPr>
-              <a:t>Vous vous êtes coupé le doigt, ça saigne mais peu.   </a:t>
-            </a:r>
-            <a:r>
-              <a:rPr sz="1400" b="1" i="0">
-                <a:solidFill>
-                  <a:srgbClr val="07734A"/>
-                </a:solidFill>
-                <a:latin typeface="Verdana"/>
-              </a:rPr>
-              <a:t>» 811 pour savoir s'il faut des points</a:t>
+              <a:t>Vous vous êtes coupé le doigt, ça saigne mais peu.</a:t>
             </a:r>
           </a:p>
         </p:txBody>
@@ -14069,7 +14474,7 @@
             </a:avLst>
           </a:prstGeom>
           <a:solidFill>
-            <a:srgbClr val="E6F5EE"/>
+            <a:srgbClr val="FFFFFF"/>
           </a:solidFill>
           <a:ln w="12700">
             <a:solidFill>
@@ -14215,16 +14620,7 @@
                 </a:solidFill>
                 <a:latin typeface="Verdana"/>
               </a:rPr>
-              <a:t>Votre fille a la même fièvre depuis quatre jours.   </a:t>
-            </a:r>
-            <a:r>
-              <a:rPr sz="1400" b="1" i="0">
-                <a:solidFill>
-                  <a:srgbClr val="07734A"/>
-                </a:solidFill>
-                <a:latin typeface="Verdana"/>
-              </a:rPr>
-              <a:t>» la clinique ou le sans rendez-vous</a:t>
+              <a:t>Votre fille a la même fièvre depuis quatre jours.</a:t>
             </a:r>
           </a:p>
         </p:txBody>
